--- a/aula_1.pptx
+++ b/aula_1.pptx
@@ -21,26 +21,28 @@
     <p:sldId id="293" r:id="rId15"/>
     <p:sldId id="291" r:id="rId16"/>
     <p:sldId id="382" r:id="rId17"/>
-    <p:sldId id="364" r:id="rId18"/>
-    <p:sldId id="365" r:id="rId19"/>
-    <p:sldId id="366" r:id="rId20"/>
-    <p:sldId id="375" r:id="rId21"/>
-    <p:sldId id="376" r:id="rId22"/>
-    <p:sldId id="377" r:id="rId23"/>
-    <p:sldId id="378" r:id="rId24"/>
-    <p:sldId id="379" r:id="rId25"/>
-    <p:sldId id="367" r:id="rId26"/>
-    <p:sldId id="368" r:id="rId27"/>
-    <p:sldId id="369" r:id="rId28"/>
-    <p:sldId id="370" r:id="rId29"/>
-    <p:sldId id="371" r:id="rId30"/>
-    <p:sldId id="372" r:id="rId31"/>
-    <p:sldId id="373" r:id="rId32"/>
-    <p:sldId id="380" r:id="rId33"/>
-    <p:sldId id="381" r:id="rId34"/>
-    <p:sldId id="361" r:id="rId35"/>
-    <p:sldId id="374" r:id="rId36"/>
-    <p:sldId id="358" r:id="rId37"/>
+    <p:sldId id="383" r:id="rId18"/>
+    <p:sldId id="384" r:id="rId19"/>
+    <p:sldId id="364" r:id="rId20"/>
+    <p:sldId id="365" r:id="rId21"/>
+    <p:sldId id="366" r:id="rId22"/>
+    <p:sldId id="375" r:id="rId23"/>
+    <p:sldId id="376" r:id="rId24"/>
+    <p:sldId id="377" r:id="rId25"/>
+    <p:sldId id="378" r:id="rId26"/>
+    <p:sldId id="379" r:id="rId27"/>
+    <p:sldId id="367" r:id="rId28"/>
+    <p:sldId id="368" r:id="rId29"/>
+    <p:sldId id="369" r:id="rId30"/>
+    <p:sldId id="370" r:id="rId31"/>
+    <p:sldId id="371" r:id="rId32"/>
+    <p:sldId id="372" r:id="rId33"/>
+    <p:sldId id="373" r:id="rId34"/>
+    <p:sldId id="380" r:id="rId35"/>
+    <p:sldId id="381" r:id="rId36"/>
+    <p:sldId id="361" r:id="rId37"/>
+    <p:sldId id="374" r:id="rId38"/>
+    <p:sldId id="358" r:id="rId39"/>
   </p:sldIdLst>
   <p:sldSz cx="12192000" cy="6858000"/>
   <p:notesSz cx="6797675" cy="9926638"/>
@@ -2075,6 +2077,13 @@
         </dgm:presLayoutVars>
       </dgm:prSet>
       <dgm:spPr/>
+      <dgm:t>
+        <a:bodyPr/>
+        <a:lstStyle/>
+        <a:p>
+          <a:endParaRPr lang="pt-BR"/>
+        </a:p>
+      </dgm:t>
     </dgm:pt>
     <dgm:pt modelId="{B00D1DFC-7F9C-4E65-986A-301B7EA4BE9C}" type="pres">
       <dgm:prSet presAssocID="{8F770151-CE04-4F14-891F-558648EDB3D6}" presName="linNode" presStyleCnt="0"/>
@@ -2088,6 +2097,13 @@
         </dgm:presLayoutVars>
       </dgm:prSet>
       <dgm:spPr/>
+      <dgm:t>
+        <a:bodyPr/>
+        <a:lstStyle/>
+        <a:p>
+          <a:endParaRPr lang="pt-BR"/>
+        </a:p>
+      </dgm:t>
     </dgm:pt>
     <dgm:pt modelId="{B895ADCD-EA73-4FF8-823C-D9F8A66512FE}" type="pres">
       <dgm:prSet presAssocID="{8F770151-CE04-4F14-891F-558648EDB3D6}" presName="descendantText" presStyleLbl="alignAccFollowNode1" presStyleIdx="0" presStyleCnt="4">
@@ -2096,6 +2112,13 @@
         </dgm:presLayoutVars>
       </dgm:prSet>
       <dgm:spPr/>
+      <dgm:t>
+        <a:bodyPr/>
+        <a:lstStyle/>
+        <a:p>
+          <a:endParaRPr lang="pt-BR"/>
+        </a:p>
+      </dgm:t>
     </dgm:pt>
     <dgm:pt modelId="{C810856C-61E9-4212-8730-6E4D0ED4ACEF}" type="pres">
       <dgm:prSet presAssocID="{E2A1897C-1119-4946-95DF-0F6DA6FF186C}" presName="sp" presStyleCnt="0"/>
@@ -2113,6 +2136,13 @@
         </dgm:presLayoutVars>
       </dgm:prSet>
       <dgm:spPr/>
+      <dgm:t>
+        <a:bodyPr/>
+        <a:lstStyle/>
+        <a:p>
+          <a:endParaRPr lang="pt-BR"/>
+        </a:p>
+      </dgm:t>
     </dgm:pt>
     <dgm:pt modelId="{DCFC37BD-2A29-4F02-8344-A33E781801CB}" type="pres">
       <dgm:prSet presAssocID="{9B66BB59-8281-4C6B-9A57-69876CC7B13C}" presName="descendantText" presStyleLbl="alignAccFollowNode1" presStyleIdx="1" presStyleCnt="4">
@@ -2121,6 +2151,13 @@
         </dgm:presLayoutVars>
       </dgm:prSet>
       <dgm:spPr/>
+      <dgm:t>
+        <a:bodyPr/>
+        <a:lstStyle/>
+        <a:p>
+          <a:endParaRPr lang="pt-BR"/>
+        </a:p>
+      </dgm:t>
     </dgm:pt>
     <dgm:pt modelId="{4E99F023-2A2A-4D53-81E4-517AD6B5975E}" type="pres">
       <dgm:prSet presAssocID="{60EB0A24-E80B-4989-9EDA-8C091B538BFC}" presName="sp" presStyleCnt="0"/>
@@ -2138,6 +2175,13 @@
         </dgm:presLayoutVars>
       </dgm:prSet>
       <dgm:spPr/>
+      <dgm:t>
+        <a:bodyPr/>
+        <a:lstStyle/>
+        <a:p>
+          <a:endParaRPr lang="pt-BR"/>
+        </a:p>
+      </dgm:t>
     </dgm:pt>
     <dgm:pt modelId="{BCC6D6DB-0A94-474F-B1D2-97C59165708E}" type="pres">
       <dgm:prSet presAssocID="{7BE5B67F-FA0A-49CA-8489-F7B4C418364B}" presName="descendantText" presStyleLbl="alignAccFollowNode1" presStyleIdx="2" presStyleCnt="4">
@@ -2146,6 +2190,13 @@
         </dgm:presLayoutVars>
       </dgm:prSet>
       <dgm:spPr/>
+      <dgm:t>
+        <a:bodyPr/>
+        <a:lstStyle/>
+        <a:p>
+          <a:endParaRPr lang="pt-BR"/>
+        </a:p>
+      </dgm:t>
     </dgm:pt>
     <dgm:pt modelId="{70D94D71-7862-471D-93EA-414565893D3B}" type="pres">
       <dgm:prSet presAssocID="{DD5428C0-BF49-4AEA-B35D-DE9F4E26E600}" presName="sp" presStyleCnt="0"/>
@@ -2163,6 +2214,13 @@
         </dgm:presLayoutVars>
       </dgm:prSet>
       <dgm:spPr/>
+      <dgm:t>
+        <a:bodyPr/>
+        <a:lstStyle/>
+        <a:p>
+          <a:endParaRPr lang="pt-BR"/>
+        </a:p>
+      </dgm:t>
     </dgm:pt>
     <dgm:pt modelId="{A6BF4243-8DA0-4A57-BBAF-4BD71D9E6A02}" type="pres">
       <dgm:prSet presAssocID="{9D81E739-4A7C-4AB3-9DCB-B9492C8E97AD}" presName="descendantText" presStyleLbl="alignAccFollowNode1" presStyleIdx="3" presStyleCnt="4">
@@ -2171,42 +2229,49 @@
         </dgm:presLayoutVars>
       </dgm:prSet>
       <dgm:spPr/>
+      <dgm:t>
+        <a:bodyPr/>
+        <a:lstStyle/>
+        <a:p>
+          <a:endParaRPr lang="pt-BR"/>
+        </a:p>
+      </dgm:t>
     </dgm:pt>
   </dgm:ptLst>
   <dgm:cxnLst>
-    <dgm:cxn modelId="{482C7F09-6956-4C8F-8CA5-EC6BE6B812B9}" type="presOf" srcId="{3C4E6531-50C8-43A1-AA4E-BDA126A2105A}" destId="{A6BF4243-8DA0-4A57-BBAF-4BD71D9E6A02}" srcOrd="0" destOrd="1" presId="urn:microsoft.com/office/officeart/2005/8/layout/vList5"/>
+    <dgm:cxn modelId="{391F99F6-A77E-4D9F-9CF0-499C977A64DD}" type="presOf" srcId="{018FE19F-9FC4-4D13-87BD-A4FD1EF5E6F0}" destId="{46DF9E6F-2027-4A1D-BC96-83A2CF6DEDE5}" srcOrd="0" destOrd="0" presId="urn:microsoft.com/office/officeart/2005/8/layout/vList5"/>
+    <dgm:cxn modelId="{09EF10CC-119E-4F5E-B5D2-7334F4EBD8EC}" type="presOf" srcId="{636A32A2-1111-4BA8-9BBB-A7A19EA65CF8}" destId="{B895ADCD-EA73-4FF8-823C-D9F8A66512FE}" srcOrd="0" destOrd="2" presId="urn:microsoft.com/office/officeart/2005/8/layout/vList5"/>
+    <dgm:cxn modelId="{1AFD1A61-F3C3-4EBE-A959-2E90428918F9}" type="presOf" srcId="{7BE5B67F-FA0A-49CA-8489-F7B4C418364B}" destId="{7585F882-55F0-4178-92CD-A447CFB6D055}" srcOrd="0" destOrd="0" presId="urn:microsoft.com/office/officeart/2005/8/layout/vList5"/>
+    <dgm:cxn modelId="{C052C9D6-4615-4997-8C43-168C277B4FB0}" type="presOf" srcId="{9B66BB59-8281-4C6B-9A57-69876CC7B13C}" destId="{039A4411-D22F-47FA-9A94-46B3757745D8}" srcOrd="0" destOrd="0" presId="urn:microsoft.com/office/officeart/2005/8/layout/vList5"/>
     <dgm:cxn modelId="{EE60090C-F52F-4491-B408-575497E44F41}" srcId="{9B66BB59-8281-4C6B-9A57-69876CC7B13C}" destId="{CC73023D-3D0B-4288-97DC-23B498CE8A9F}" srcOrd="1" destOrd="0" parTransId="{463D7B41-40F8-4A66-A3CC-CD513F1BD203}" sibTransId="{8CC60BE8-7CA4-4C79-93CB-7BE4CD1E3380}"/>
-    <dgm:cxn modelId="{E3512711-7FD0-4738-8112-3F144B5A6F30}" type="presOf" srcId="{B2A75B5B-FDC4-4B2C-8EAE-F050F449D9D5}" destId="{DCFC37BD-2A29-4F02-8344-A33E781801CB}" srcOrd="0" destOrd="2" presId="urn:microsoft.com/office/officeart/2005/8/layout/vList5"/>
+    <dgm:cxn modelId="{76E830CA-525B-49AB-B92A-8FBC1C73AB71}" type="presOf" srcId="{CCD3C690-B70B-4666-945F-3D5B7DF04CE8}" destId="{BCC6D6DB-0A94-474F-B1D2-97C59165708E}" srcOrd="0" destOrd="2" presId="urn:microsoft.com/office/officeart/2005/8/layout/vList5"/>
+    <dgm:cxn modelId="{B6D3795A-2A19-4A92-9B3B-55B306A364A0}" type="presOf" srcId="{EBCBBD6F-D7CC-441E-AFE0-D3A02026E66A}" destId="{DCFC37BD-2A29-4F02-8344-A33E781801CB}" srcOrd="0" destOrd="0" presId="urn:microsoft.com/office/officeart/2005/8/layout/vList5"/>
+    <dgm:cxn modelId="{D3B18AC1-EC66-4F52-9416-139B3DE3565B}" srcId="{018FE19F-9FC4-4D13-87BD-A4FD1EF5E6F0}" destId="{7BE5B67F-FA0A-49CA-8489-F7B4C418364B}" srcOrd="2" destOrd="0" parTransId="{FDF28679-6E5B-46C6-ABA2-2901194C66E4}" sibTransId="{DD5428C0-BF49-4AEA-B35D-DE9F4E26E600}"/>
+    <dgm:cxn modelId="{EB5903BD-9378-461E-8A3F-D84BA1EB895F}" srcId="{9B66BB59-8281-4C6B-9A57-69876CC7B13C}" destId="{EBCBBD6F-D7CC-441E-AFE0-D3A02026E66A}" srcOrd="0" destOrd="0" parTransId="{C8C4FD2B-CF9B-490A-AEBB-5D43E22D676B}" sibTransId="{8F1AE709-F09D-4C90-AEC9-696935879DDC}"/>
+    <dgm:cxn modelId="{6DBB66F9-BF52-410E-8CDD-7724DA548A26}" srcId="{018FE19F-9FC4-4D13-87BD-A4FD1EF5E6F0}" destId="{8F770151-CE04-4F14-891F-558648EDB3D6}" srcOrd="0" destOrd="0" parTransId="{133BE85D-D365-4C86-96E1-67AC9A1FABF0}" sibTransId="{E2A1897C-1119-4946-95DF-0F6DA6FF186C}"/>
+    <dgm:cxn modelId="{12B56199-988C-4BEF-8748-2349E422C598}" srcId="{7BE5B67F-FA0A-49CA-8489-F7B4C418364B}" destId="{3207446D-77B2-4F48-9566-A2E0673A581A}" srcOrd="1" destOrd="0" parTransId="{9CD90A61-1872-430D-A5D5-0C330417C1F8}" sibTransId="{EC64B26B-6B02-4508-A13B-45442C7A153E}"/>
+    <dgm:cxn modelId="{B323A0BC-44CB-40D1-A3D2-DEDA6CD3C29F}" srcId="{8F770151-CE04-4F14-891F-558648EDB3D6}" destId="{271AEAD0-13DB-4C64-9553-B4A30BB60E54}" srcOrd="0" destOrd="0" parTransId="{9DADB2CE-EDA4-44C4-ACD9-4906751FC324}" sibTransId="{5ED07C53-A12A-4CF2-9F97-961FD87F40D4}"/>
+    <dgm:cxn modelId="{157B3B55-B0FE-46BC-822A-22F9F26EBE37}" type="presOf" srcId="{72B3A532-C8D8-4381-B6BF-AE805FE76E57}" destId="{BCC6D6DB-0A94-474F-B1D2-97C59165708E}" srcOrd="0" destOrd="0" presId="urn:microsoft.com/office/officeart/2005/8/layout/vList5"/>
+    <dgm:cxn modelId="{A95593B9-9285-46AF-8242-C06D52C1ECCB}" srcId="{018FE19F-9FC4-4D13-87BD-A4FD1EF5E6F0}" destId="{9B66BB59-8281-4C6B-9A57-69876CC7B13C}" srcOrd="1" destOrd="0" parTransId="{21D77081-19F9-4DD3-ABFA-81A140E16034}" sibTransId="{60EB0A24-E80B-4989-9EDA-8C091B538BFC}"/>
     <dgm:cxn modelId="{B01BC811-27A1-409F-9760-E9CC6F538888}" type="presOf" srcId="{8F770151-CE04-4F14-891F-558648EDB3D6}" destId="{10DE05F8-B16A-402E-B23F-414C41DCDA8D}" srcOrd="0" destOrd="0" presId="urn:microsoft.com/office/officeart/2005/8/layout/vList5"/>
-    <dgm:cxn modelId="{E0859535-D186-4CD0-91E6-6A897CF6BF19}" srcId="{9B66BB59-8281-4C6B-9A57-69876CC7B13C}" destId="{B2A75B5B-FDC4-4B2C-8EAE-F050F449D9D5}" srcOrd="2" destOrd="0" parTransId="{2098782B-D832-43D3-867A-25232CDAF8F0}" sibTransId="{A2866E13-80E1-4407-8F54-25EFB151505E}"/>
-    <dgm:cxn modelId="{49660837-0E10-4D5C-942B-F9B180A18C39}" type="presOf" srcId="{58B98114-764B-4BAA-8B70-4DAB50012665}" destId="{A6BF4243-8DA0-4A57-BBAF-4BD71D9E6A02}" srcOrd="0" destOrd="0" presId="urn:microsoft.com/office/officeart/2005/8/layout/vList5"/>
-    <dgm:cxn modelId="{1AFD1A61-F3C3-4EBE-A959-2E90428918F9}" type="presOf" srcId="{7BE5B67F-FA0A-49CA-8489-F7B4C418364B}" destId="{7585F882-55F0-4178-92CD-A447CFB6D055}" srcOrd="0" destOrd="0" presId="urn:microsoft.com/office/officeart/2005/8/layout/vList5"/>
-    <dgm:cxn modelId="{A801B645-81E5-4497-9ADA-F50CEE6AF635}" srcId="{9D81E739-4A7C-4AB3-9DCB-B9492C8E97AD}" destId="{E0875852-4A36-459F-A5C7-FA9CD84F10F5}" srcOrd="2" destOrd="0" parTransId="{2CD5101C-011C-47B2-99BE-8FD7EA1FC9C1}" sibTransId="{78D96F42-12A8-42C1-8EE8-CE57EE3096C4}"/>
     <dgm:cxn modelId="{7FD0E669-40B5-4182-8E03-8CD4D4E06C03}" srcId="{9D81E739-4A7C-4AB3-9DCB-B9492C8E97AD}" destId="{3C4E6531-50C8-43A1-AA4E-BDA126A2105A}" srcOrd="1" destOrd="0" parTransId="{7A9B91B8-58D9-4D34-A1E1-84F10BF339B4}" sibTransId="{2D330531-9401-466A-BB44-0145B3BE06D0}"/>
+    <dgm:cxn modelId="{29BAAEB9-3DF3-4BA7-AAD2-5324694E372D}" srcId="{8F770151-CE04-4F14-891F-558648EDB3D6}" destId="{636A32A2-1111-4BA8-9BBB-A7A19EA65CF8}" srcOrd="2" destOrd="0" parTransId="{DF579453-E96E-4B82-80F7-FAC78C8A3E4C}" sibTransId="{A3315C76-7DE0-468C-9A1D-1D5B650CAADB}"/>
+    <dgm:cxn modelId="{2239238C-F15A-4E37-B532-653B659159AA}" type="presOf" srcId="{CC73023D-3D0B-4288-97DC-23B498CE8A9F}" destId="{DCFC37BD-2A29-4F02-8344-A33E781801CB}" srcOrd="0" destOrd="1" presId="urn:microsoft.com/office/officeart/2005/8/layout/vList5"/>
+    <dgm:cxn modelId="{4E0F9DD2-3ABD-4EC2-BCAB-C4FE82610D47}" srcId="{8F770151-CE04-4F14-891F-558648EDB3D6}" destId="{E78CC01B-71A3-473C-9207-8001E47126D5}" srcOrd="1" destOrd="0" parTransId="{F12B4418-ADAF-4D24-9C59-8B4ECC3AC89B}" sibTransId="{92CA950B-BBEF-4478-8FCE-DC4A5C5E7CAE}"/>
     <dgm:cxn modelId="{4087B34C-3E6F-44D4-B3F6-9542C4A6209A}" type="presOf" srcId="{E78CC01B-71A3-473C-9207-8001E47126D5}" destId="{B895ADCD-EA73-4FF8-823C-D9F8A66512FE}" srcOrd="0" destOrd="1" presId="urn:microsoft.com/office/officeart/2005/8/layout/vList5"/>
     <dgm:cxn modelId="{33F9F34F-F4FD-4483-9C21-43CD5FA16372}" type="presOf" srcId="{271AEAD0-13DB-4C64-9553-B4A30BB60E54}" destId="{B895ADCD-EA73-4FF8-823C-D9F8A66512FE}" srcOrd="0" destOrd="0" presId="urn:microsoft.com/office/officeart/2005/8/layout/vList5"/>
-    <dgm:cxn modelId="{157B3B55-B0FE-46BC-822A-22F9F26EBE37}" type="presOf" srcId="{72B3A532-C8D8-4381-B6BF-AE805FE76E57}" destId="{BCC6D6DB-0A94-474F-B1D2-97C59165708E}" srcOrd="0" destOrd="0" presId="urn:microsoft.com/office/officeart/2005/8/layout/vList5"/>
+    <dgm:cxn modelId="{A801B645-81E5-4497-9ADA-F50CEE6AF635}" srcId="{9D81E739-4A7C-4AB3-9DCB-B9492C8E97AD}" destId="{E0875852-4A36-459F-A5C7-FA9CD84F10F5}" srcOrd="2" destOrd="0" parTransId="{2CD5101C-011C-47B2-99BE-8FD7EA1FC9C1}" sibTransId="{78D96F42-12A8-42C1-8EE8-CE57EE3096C4}"/>
+    <dgm:cxn modelId="{49660837-0E10-4D5C-942B-F9B180A18C39}" type="presOf" srcId="{58B98114-764B-4BAA-8B70-4DAB50012665}" destId="{A6BF4243-8DA0-4A57-BBAF-4BD71D9E6A02}" srcOrd="0" destOrd="0" presId="urn:microsoft.com/office/officeart/2005/8/layout/vList5"/>
+    <dgm:cxn modelId="{E0859535-D186-4CD0-91E6-6A897CF6BF19}" srcId="{9B66BB59-8281-4C6B-9A57-69876CC7B13C}" destId="{B2A75B5B-FDC4-4B2C-8EAE-F050F449D9D5}" srcOrd="2" destOrd="0" parTransId="{2098782B-D832-43D3-867A-25232CDAF8F0}" sibTransId="{A2866E13-80E1-4407-8F54-25EFB151505E}"/>
+    <dgm:cxn modelId="{482C7F09-6956-4C8F-8CA5-EC6BE6B812B9}" type="presOf" srcId="{3C4E6531-50C8-43A1-AA4E-BDA126A2105A}" destId="{A6BF4243-8DA0-4A57-BBAF-4BD71D9E6A02}" srcOrd="0" destOrd="1" presId="urn:microsoft.com/office/officeart/2005/8/layout/vList5"/>
+    <dgm:cxn modelId="{E3512711-7FD0-4738-8112-3F144B5A6F30}" type="presOf" srcId="{B2A75B5B-FDC4-4B2C-8EAE-F050F449D9D5}" destId="{DCFC37BD-2A29-4F02-8344-A33E781801CB}" srcOrd="0" destOrd="2" presId="urn:microsoft.com/office/officeart/2005/8/layout/vList5"/>
+    <dgm:cxn modelId="{F7319695-7E0C-4093-91EA-4E7670A0F61B}" srcId="{018FE19F-9FC4-4D13-87BD-A4FD1EF5E6F0}" destId="{9D81E739-4A7C-4AB3-9DCB-B9492C8E97AD}" srcOrd="3" destOrd="0" parTransId="{3F2D1ACD-EA74-4981-980E-1D336AA668B9}" sibTransId="{C732AEF9-4EB4-4A16-81CF-6E76ADC9D829}"/>
+    <dgm:cxn modelId="{499057F2-F87F-41B8-973D-7C4826AC7B12}" srcId="{9D81E739-4A7C-4AB3-9DCB-B9492C8E97AD}" destId="{58B98114-764B-4BAA-8B70-4DAB50012665}" srcOrd="0" destOrd="0" parTransId="{CD520E00-6564-44FD-B3C4-722D04DE215E}" sibTransId="{4B5582BA-A628-47D9-A3EB-EB40C96DC828}"/>
+    <dgm:cxn modelId="{4974D794-E4A1-4F2E-967D-D707E71AB11A}" type="presOf" srcId="{E0875852-4A36-459F-A5C7-FA9CD84F10F5}" destId="{A6BF4243-8DA0-4A57-BBAF-4BD71D9E6A02}" srcOrd="0" destOrd="2" presId="urn:microsoft.com/office/officeart/2005/8/layout/vList5"/>
+    <dgm:cxn modelId="{2AFD9AFF-8FED-4DB0-A857-2B3DBA64FD39}" type="presOf" srcId="{9D81E739-4A7C-4AB3-9DCB-B9492C8E97AD}" destId="{3C3EE85C-A333-4A38-BBF7-36D03D806886}" srcOrd="0" destOrd="0" presId="urn:microsoft.com/office/officeart/2005/8/layout/vList5"/>
     <dgm:cxn modelId="{96810659-48D4-46CF-8D2C-6850C43D2FAB}" type="presOf" srcId="{3207446D-77B2-4F48-9566-A2E0673A581A}" destId="{BCC6D6DB-0A94-474F-B1D2-97C59165708E}" srcOrd="0" destOrd="1" presId="urn:microsoft.com/office/officeart/2005/8/layout/vList5"/>
-    <dgm:cxn modelId="{B6D3795A-2A19-4A92-9B3B-55B306A364A0}" type="presOf" srcId="{EBCBBD6F-D7CC-441E-AFE0-D3A02026E66A}" destId="{DCFC37BD-2A29-4F02-8344-A33E781801CB}" srcOrd="0" destOrd="0" presId="urn:microsoft.com/office/officeart/2005/8/layout/vList5"/>
+    <dgm:cxn modelId="{5623D8EE-4CC6-4A84-9EB8-D0BEAE1217BB}" srcId="{7BE5B67F-FA0A-49CA-8489-F7B4C418364B}" destId="{72B3A532-C8D8-4381-B6BF-AE805FE76E57}" srcOrd="0" destOrd="0" parTransId="{0105014B-A2C6-46E8-97B8-CA24187968EF}" sibTransId="{5E256F88-12B1-49B1-A6AF-A57E581E3824}"/>
     <dgm:cxn modelId="{EDA2E582-07E5-45ED-A7B7-1B682BE372D2}" srcId="{7BE5B67F-FA0A-49CA-8489-F7B4C418364B}" destId="{CCD3C690-B70B-4666-945F-3D5B7DF04CE8}" srcOrd="2" destOrd="0" parTransId="{A18B8431-7ABA-4735-9858-B5F9614810CD}" sibTransId="{B1D50217-4543-4C5C-B654-2CBEC9C61CCC}"/>
-    <dgm:cxn modelId="{2239238C-F15A-4E37-B532-653B659159AA}" type="presOf" srcId="{CC73023D-3D0B-4288-97DC-23B498CE8A9F}" destId="{DCFC37BD-2A29-4F02-8344-A33E781801CB}" srcOrd="0" destOrd="1" presId="urn:microsoft.com/office/officeart/2005/8/layout/vList5"/>
-    <dgm:cxn modelId="{4974D794-E4A1-4F2E-967D-D707E71AB11A}" type="presOf" srcId="{E0875852-4A36-459F-A5C7-FA9CD84F10F5}" destId="{A6BF4243-8DA0-4A57-BBAF-4BD71D9E6A02}" srcOrd="0" destOrd="2" presId="urn:microsoft.com/office/officeart/2005/8/layout/vList5"/>
-    <dgm:cxn modelId="{F7319695-7E0C-4093-91EA-4E7670A0F61B}" srcId="{018FE19F-9FC4-4D13-87BD-A4FD1EF5E6F0}" destId="{9D81E739-4A7C-4AB3-9DCB-B9492C8E97AD}" srcOrd="3" destOrd="0" parTransId="{3F2D1ACD-EA74-4981-980E-1D336AA668B9}" sibTransId="{C732AEF9-4EB4-4A16-81CF-6E76ADC9D829}"/>
-    <dgm:cxn modelId="{12B56199-988C-4BEF-8748-2349E422C598}" srcId="{7BE5B67F-FA0A-49CA-8489-F7B4C418364B}" destId="{3207446D-77B2-4F48-9566-A2E0673A581A}" srcOrd="1" destOrd="0" parTransId="{9CD90A61-1872-430D-A5D5-0C330417C1F8}" sibTransId="{EC64B26B-6B02-4508-A13B-45442C7A153E}"/>
-    <dgm:cxn modelId="{A95593B9-9285-46AF-8242-C06D52C1ECCB}" srcId="{018FE19F-9FC4-4D13-87BD-A4FD1EF5E6F0}" destId="{9B66BB59-8281-4C6B-9A57-69876CC7B13C}" srcOrd="1" destOrd="0" parTransId="{21D77081-19F9-4DD3-ABFA-81A140E16034}" sibTransId="{60EB0A24-E80B-4989-9EDA-8C091B538BFC}"/>
-    <dgm:cxn modelId="{29BAAEB9-3DF3-4BA7-AAD2-5324694E372D}" srcId="{8F770151-CE04-4F14-891F-558648EDB3D6}" destId="{636A32A2-1111-4BA8-9BBB-A7A19EA65CF8}" srcOrd="2" destOrd="0" parTransId="{DF579453-E96E-4B82-80F7-FAC78C8A3E4C}" sibTransId="{A3315C76-7DE0-468C-9A1D-1D5B650CAADB}"/>
-    <dgm:cxn modelId="{B323A0BC-44CB-40D1-A3D2-DEDA6CD3C29F}" srcId="{8F770151-CE04-4F14-891F-558648EDB3D6}" destId="{271AEAD0-13DB-4C64-9553-B4A30BB60E54}" srcOrd="0" destOrd="0" parTransId="{9DADB2CE-EDA4-44C4-ACD9-4906751FC324}" sibTransId="{5ED07C53-A12A-4CF2-9F97-961FD87F40D4}"/>
-    <dgm:cxn modelId="{EB5903BD-9378-461E-8A3F-D84BA1EB895F}" srcId="{9B66BB59-8281-4C6B-9A57-69876CC7B13C}" destId="{EBCBBD6F-D7CC-441E-AFE0-D3A02026E66A}" srcOrd="0" destOrd="0" parTransId="{C8C4FD2B-CF9B-490A-AEBB-5D43E22D676B}" sibTransId="{8F1AE709-F09D-4C90-AEC9-696935879DDC}"/>
-    <dgm:cxn modelId="{D3B18AC1-EC66-4F52-9416-139B3DE3565B}" srcId="{018FE19F-9FC4-4D13-87BD-A4FD1EF5E6F0}" destId="{7BE5B67F-FA0A-49CA-8489-F7B4C418364B}" srcOrd="2" destOrd="0" parTransId="{FDF28679-6E5B-46C6-ABA2-2901194C66E4}" sibTransId="{DD5428C0-BF49-4AEA-B35D-DE9F4E26E600}"/>
-    <dgm:cxn modelId="{76E830CA-525B-49AB-B92A-8FBC1C73AB71}" type="presOf" srcId="{CCD3C690-B70B-4666-945F-3D5B7DF04CE8}" destId="{BCC6D6DB-0A94-474F-B1D2-97C59165708E}" srcOrd="0" destOrd="2" presId="urn:microsoft.com/office/officeart/2005/8/layout/vList5"/>
-    <dgm:cxn modelId="{09EF10CC-119E-4F5E-B5D2-7334F4EBD8EC}" type="presOf" srcId="{636A32A2-1111-4BA8-9BBB-A7A19EA65CF8}" destId="{B895ADCD-EA73-4FF8-823C-D9F8A66512FE}" srcOrd="0" destOrd="2" presId="urn:microsoft.com/office/officeart/2005/8/layout/vList5"/>
-    <dgm:cxn modelId="{4E0F9DD2-3ABD-4EC2-BCAB-C4FE82610D47}" srcId="{8F770151-CE04-4F14-891F-558648EDB3D6}" destId="{E78CC01B-71A3-473C-9207-8001E47126D5}" srcOrd="1" destOrd="0" parTransId="{F12B4418-ADAF-4D24-9C59-8B4ECC3AC89B}" sibTransId="{92CA950B-BBEF-4478-8FCE-DC4A5C5E7CAE}"/>
-    <dgm:cxn modelId="{C052C9D6-4615-4997-8C43-168C277B4FB0}" type="presOf" srcId="{9B66BB59-8281-4C6B-9A57-69876CC7B13C}" destId="{039A4411-D22F-47FA-9A94-46B3757745D8}" srcOrd="0" destOrd="0" presId="urn:microsoft.com/office/officeart/2005/8/layout/vList5"/>
-    <dgm:cxn modelId="{5623D8EE-4CC6-4A84-9EB8-D0BEAE1217BB}" srcId="{7BE5B67F-FA0A-49CA-8489-F7B4C418364B}" destId="{72B3A532-C8D8-4381-B6BF-AE805FE76E57}" srcOrd="0" destOrd="0" parTransId="{0105014B-A2C6-46E8-97B8-CA24187968EF}" sibTransId="{5E256F88-12B1-49B1-A6AF-A57E581E3824}"/>
-    <dgm:cxn modelId="{499057F2-F87F-41B8-973D-7C4826AC7B12}" srcId="{9D81E739-4A7C-4AB3-9DCB-B9492C8E97AD}" destId="{58B98114-764B-4BAA-8B70-4DAB50012665}" srcOrd="0" destOrd="0" parTransId="{CD520E00-6564-44FD-B3C4-722D04DE215E}" sibTransId="{4B5582BA-A628-47D9-A3EB-EB40C96DC828}"/>
-    <dgm:cxn modelId="{391F99F6-A77E-4D9F-9CF0-499C977A64DD}" type="presOf" srcId="{018FE19F-9FC4-4D13-87BD-A4FD1EF5E6F0}" destId="{46DF9E6F-2027-4A1D-BC96-83A2CF6DEDE5}" srcOrd="0" destOrd="0" presId="urn:microsoft.com/office/officeart/2005/8/layout/vList5"/>
-    <dgm:cxn modelId="{6DBB66F9-BF52-410E-8CDD-7724DA548A26}" srcId="{018FE19F-9FC4-4D13-87BD-A4FD1EF5E6F0}" destId="{8F770151-CE04-4F14-891F-558648EDB3D6}" srcOrd="0" destOrd="0" parTransId="{133BE85D-D365-4C86-96E1-67AC9A1FABF0}" sibTransId="{E2A1897C-1119-4946-95DF-0F6DA6FF186C}"/>
-    <dgm:cxn modelId="{2AFD9AFF-8FED-4DB0-A857-2B3DBA64FD39}" type="presOf" srcId="{9D81E739-4A7C-4AB3-9DCB-B9492C8E97AD}" destId="{3C3EE85C-A333-4A38-BBF7-36D03D806886}" srcOrd="0" destOrd="0" presId="urn:microsoft.com/office/officeart/2005/8/layout/vList5"/>
     <dgm:cxn modelId="{EDA7CFB0-8436-4D95-A8AC-241A2630D6D4}" type="presParOf" srcId="{46DF9E6F-2027-4A1D-BC96-83A2CF6DEDE5}" destId="{B00D1DFC-7F9C-4E65-986A-301B7EA4BE9C}" srcOrd="0" destOrd="0" presId="urn:microsoft.com/office/officeart/2005/8/layout/vList5"/>
     <dgm:cxn modelId="{C22AA635-E76A-4B14-8687-D04BFFCBA780}" type="presParOf" srcId="{B00D1DFC-7F9C-4E65-986A-301B7EA4BE9C}" destId="{10DE05F8-B16A-402E-B23F-414C41DCDA8D}" srcOrd="0" destOrd="0" presId="urn:microsoft.com/office/officeart/2005/8/layout/vList5"/>
     <dgm:cxn modelId="{90255438-57EE-421E-9B46-F310DC996B56}" type="presParOf" srcId="{B00D1DFC-7F9C-4E65-986A-301B7EA4BE9C}" destId="{B895ADCD-EA73-4FF8-823C-D9F8A66512FE}" srcOrd="1" destOrd="0" presId="urn:microsoft.com/office/officeart/2005/8/layout/vList5"/>
@@ -2308,7 +2373,7 @@
             <a:spcAft>
               <a:spcPct val="15000"/>
             </a:spcAft>
-            <a:buChar char="•"/>
+            <a:buChar char="••"/>
           </a:pPr>
           <a:r>
             <a:rPr lang="pt-BR" sz="1600" kern="1200" dirty="0"/>
@@ -2326,7 +2391,7 @@
             <a:spcAft>
               <a:spcPct val="15000"/>
             </a:spcAft>
-            <a:buChar char="•"/>
+            <a:buChar char="••"/>
           </a:pPr>
           <a:r>
             <a:rPr lang="pt-BR" sz="1600" kern="1200" dirty="0"/>
@@ -2344,7 +2409,7 @@
             <a:spcAft>
               <a:spcPct val="15000"/>
             </a:spcAft>
-            <a:buChar char="•"/>
+            <a:buChar char="••"/>
           </a:pPr>
           <a:r>
             <a:rPr lang="pt-BR" sz="1600" kern="1200" dirty="0"/>
@@ -2412,7 +2477,7 @@
         </a:bodyPr>
         <a:lstStyle/>
         <a:p>
-          <a:pPr marL="0" lvl="0" indent="0" algn="ctr" defTabSz="800100">
+          <a:pPr lvl="0" algn="ctr" defTabSz="800100">
             <a:lnSpc>
               <a:spcPct val="90000"/>
             </a:lnSpc>
@@ -2422,7 +2487,6 @@
             <a:spcAft>
               <a:spcPct val="35000"/>
             </a:spcAft>
-            <a:buNone/>
           </a:pPr>
           <a:r>
             <a:rPr lang="pt-BR" sz="1800" kern="1200" dirty="0"/>
@@ -2430,7 +2494,7 @@
           </a:r>
         </a:p>
         <a:p>
-          <a:pPr marL="0" lvl="0" indent="0" algn="ctr" defTabSz="800100">
+          <a:pPr lvl="0" algn="ctr" defTabSz="800100">
             <a:lnSpc>
               <a:spcPct val="90000"/>
             </a:lnSpc>
@@ -2440,7 +2504,6 @@
             <a:spcAft>
               <a:spcPct val="35000"/>
             </a:spcAft>
-            <a:buNone/>
           </a:pPr>
           <a:r>
             <a:rPr lang="pt-BR" sz="1800" kern="1200" dirty="0"/>
@@ -2520,7 +2583,7 @@
             <a:spcAft>
               <a:spcPct val="15000"/>
             </a:spcAft>
-            <a:buChar char="•"/>
+            <a:buChar char="••"/>
           </a:pPr>
           <a:r>
             <a:rPr lang="pt-BR" sz="1600" kern="1200" dirty="0"/>
@@ -2538,7 +2601,7 @@
             <a:spcAft>
               <a:spcPct val="15000"/>
             </a:spcAft>
-            <a:buChar char="•"/>
+            <a:buChar char="••"/>
           </a:pPr>
           <a:r>
             <a:rPr lang="pt-BR" sz="1600" kern="1200" dirty="0"/>
@@ -2556,7 +2619,7 @@
             <a:spcAft>
               <a:spcPct val="15000"/>
             </a:spcAft>
-            <a:buChar char="•"/>
+            <a:buChar char="••"/>
           </a:pPr>
           <a:r>
             <a:rPr lang="pt-BR" sz="1600" kern="1200" dirty="0"/>
@@ -2624,7 +2687,7 @@
         </a:bodyPr>
         <a:lstStyle/>
         <a:p>
-          <a:pPr marL="0" lvl="0" indent="0" algn="ctr" defTabSz="800100">
+          <a:pPr lvl="0" algn="ctr" defTabSz="800100">
             <a:lnSpc>
               <a:spcPct val="90000"/>
             </a:lnSpc>
@@ -2634,7 +2697,6 @@
             <a:spcAft>
               <a:spcPct val="35000"/>
             </a:spcAft>
-            <a:buNone/>
           </a:pPr>
           <a:r>
             <a:rPr lang="pt-BR" sz="1800" kern="1200" dirty="0"/>
@@ -2650,7 +2712,7 @@
           </a:r>
         </a:p>
         <a:p>
-          <a:pPr marL="0" lvl="0" indent="0" algn="ctr" defTabSz="800100">
+          <a:pPr lvl="0" algn="ctr" defTabSz="800100">
             <a:lnSpc>
               <a:spcPct val="90000"/>
             </a:lnSpc>
@@ -2660,7 +2722,6 @@
             <a:spcAft>
               <a:spcPct val="35000"/>
             </a:spcAft>
-            <a:buNone/>
           </a:pPr>
           <a:r>
             <a:rPr lang="pt-BR" sz="1800" kern="1200" dirty="0"/>
@@ -2740,7 +2801,7 @@
             <a:spcAft>
               <a:spcPct val="15000"/>
             </a:spcAft>
-            <a:buChar char="•"/>
+            <a:buChar char="••"/>
           </a:pPr>
           <a:r>
             <a:rPr lang="pt-BR" sz="1600" kern="1200" dirty="0"/>
@@ -2758,7 +2819,7 @@
             <a:spcAft>
               <a:spcPct val="15000"/>
             </a:spcAft>
-            <a:buChar char="•"/>
+            <a:buChar char="••"/>
           </a:pPr>
           <a:r>
             <a:rPr lang="pt-BR" sz="1600" kern="1200" dirty="0"/>
@@ -2776,7 +2837,7 @@
             <a:spcAft>
               <a:spcPct val="15000"/>
             </a:spcAft>
-            <a:buChar char="•"/>
+            <a:buChar char="••"/>
           </a:pPr>
           <a:r>
             <a:rPr lang="pt-BR" sz="1600" kern="1200" dirty="0"/>
@@ -2844,7 +2905,7 @@
         </a:bodyPr>
         <a:lstStyle/>
         <a:p>
-          <a:pPr marL="0" lvl="0" indent="0" algn="ctr" defTabSz="800100">
+          <a:pPr lvl="0" algn="ctr" defTabSz="800100">
             <a:lnSpc>
               <a:spcPct val="90000"/>
             </a:lnSpc>
@@ -2854,7 +2915,6 @@
             <a:spcAft>
               <a:spcPct val="35000"/>
             </a:spcAft>
-            <a:buNone/>
           </a:pPr>
           <a:r>
             <a:rPr lang="pt-BR" sz="1800" kern="1200" dirty="0"/>
@@ -2934,7 +2994,7 @@
             <a:spcAft>
               <a:spcPct val="15000"/>
             </a:spcAft>
-            <a:buChar char="•"/>
+            <a:buChar char="••"/>
           </a:pPr>
           <a:r>
             <a:rPr lang="pt-BR" sz="1600" kern="1200" dirty="0"/>
@@ -2965,7 +3025,7 @@
             <a:spcAft>
               <a:spcPct val="15000"/>
             </a:spcAft>
-            <a:buChar char="•"/>
+            <a:buChar char="••"/>
           </a:pPr>
           <a:r>
             <a:rPr lang="pt-BR" sz="1600" kern="1200" dirty="0"/>
@@ -2988,7 +3048,7 @@
             <a:spcAft>
               <a:spcPct val="15000"/>
             </a:spcAft>
-            <a:buChar char="•"/>
+            <a:buChar char="••"/>
           </a:pPr>
           <a:r>
             <a:rPr lang="pt-BR" sz="1600" kern="1200" dirty="0"/>
@@ -3056,7 +3116,7 @@
         </a:bodyPr>
         <a:lstStyle/>
         <a:p>
-          <a:pPr marL="0" lvl="0" indent="0" algn="ctr" defTabSz="800100">
+          <a:pPr lvl="0" algn="ctr" defTabSz="800100">
             <a:lnSpc>
               <a:spcPct val="90000"/>
             </a:lnSpc>
@@ -3066,7 +3126,6 @@
             <a:spcAft>
               <a:spcPct val="35000"/>
             </a:spcAft>
-            <a:buNone/>
           </a:pPr>
           <a:r>
             <a:rPr lang="pt-BR" sz="1800" kern="1200" dirty="0"/>
@@ -7692,7 +7751,7 @@
           <a:p>
             <a:fld id="{45B54C55-F32B-4432-9C16-2395E37A544A}" type="datetimeFigureOut">
               <a:rPr lang="pt-BR" smtClean="0"/>
-              <a:t>04/08/2025</a:t>
+              <a:t>09/02/2026</a:t>
             </a:fld>
             <a:endParaRPr lang="pt-BR"/>
           </a:p>
@@ -9276,7 +9335,7 @@
                 <a16:creationId xmlns:a16="http://schemas.microsoft.com/office/drawing/2014/main" id="{A8384FB5-9ADC-4DDC-881B-597D56F5B15D}"/>
               </a:ext>
               <a:ext uri="{C183D7F6-B498-43B3-948B-1728B52AA6E4}">
-                <adec:decorative xmlns:adec="http://schemas.microsoft.com/office/drawing/2017/decorative" val="1"/>
+                <adec:decorative xmlns:adec="http://schemas.microsoft.com/office/drawing/2017/decorative" xmlns="" val="1"/>
               </a:ext>
             </a:extLst>
           </p:cNvPr>
@@ -9352,7 +9411,7 @@
                 <a16:creationId xmlns:a16="http://schemas.microsoft.com/office/drawing/2014/main" id="{91E5A9A7-95C6-4F4F-B00E-C82E07FE62EF}"/>
               </a:ext>
               <a:ext uri="{C183D7F6-B498-43B3-948B-1728B52AA6E4}">
-                <adec:decorative xmlns:adec="http://schemas.microsoft.com/office/drawing/2017/decorative" val="1"/>
+                <adec:decorative xmlns:adec="http://schemas.microsoft.com/office/drawing/2017/decorative" xmlns="" val="1"/>
               </a:ext>
             </a:extLst>
           </p:cNvPr>
@@ -9425,7 +9484,7 @@
                 <a16:creationId xmlns:a16="http://schemas.microsoft.com/office/drawing/2014/main" id="{D07DD2DE-F619-49DD-B5E7-03A290FF4ED1}"/>
               </a:ext>
               <a:ext uri="{C183D7F6-B498-43B3-948B-1728B52AA6E4}">
-                <adec:decorative xmlns:adec="http://schemas.microsoft.com/office/drawing/2017/decorative" val="1"/>
+                <adec:decorative xmlns:adec="http://schemas.microsoft.com/office/drawing/2017/decorative" xmlns="" val="1"/>
               </a:ext>
             </a:extLst>
           </p:cNvPr>
@@ -9501,7 +9560,7 @@
                 <a16:creationId xmlns:a16="http://schemas.microsoft.com/office/drawing/2014/main" id="{85149191-5F60-4A28-AAFF-039F96B0F3EC}"/>
               </a:ext>
               <a:ext uri="{C183D7F6-B498-43B3-948B-1728B52AA6E4}">
-                <adec:decorative xmlns:adec="http://schemas.microsoft.com/office/drawing/2017/decorative" val="1"/>
+                <adec:decorative xmlns:adec="http://schemas.microsoft.com/office/drawing/2017/decorative" xmlns="" val="1"/>
               </a:ext>
             </a:extLst>
           </p:cNvPr>
@@ -9576,7 +9635,7 @@
                 <a16:creationId xmlns:a16="http://schemas.microsoft.com/office/drawing/2014/main" id="{F8260ED5-17F7-4158-B241-D51DD4CF1B7E}"/>
               </a:ext>
               <a:ext uri="{C183D7F6-B498-43B3-948B-1728B52AA6E4}">
-                <adec:decorative xmlns:adec="http://schemas.microsoft.com/office/drawing/2017/decorative" val="1"/>
+                <adec:decorative xmlns:adec="http://schemas.microsoft.com/office/drawing/2017/decorative" xmlns="" val="1"/>
               </a:ext>
             </a:extLst>
           </p:cNvPr>
@@ -10005,7 +10064,7 @@
                 <a16:creationId xmlns:a16="http://schemas.microsoft.com/office/drawing/2014/main" id="{A8384FB5-9ADC-4DDC-881B-597D56F5B15D}"/>
               </a:ext>
               <a:ext uri="{C183D7F6-B498-43B3-948B-1728B52AA6E4}">
-                <adec:decorative xmlns:adec="http://schemas.microsoft.com/office/drawing/2017/decorative" val="1"/>
+                <adec:decorative xmlns:adec="http://schemas.microsoft.com/office/drawing/2017/decorative" xmlns="" val="1"/>
               </a:ext>
             </a:extLst>
           </p:cNvPr>
@@ -10081,7 +10140,7 @@
                 <a16:creationId xmlns:a16="http://schemas.microsoft.com/office/drawing/2014/main" id="{91E5A9A7-95C6-4F4F-B00E-C82E07FE62EF}"/>
               </a:ext>
               <a:ext uri="{C183D7F6-B498-43B3-948B-1728B52AA6E4}">
-                <adec:decorative xmlns:adec="http://schemas.microsoft.com/office/drawing/2017/decorative" val="1"/>
+                <adec:decorative xmlns:adec="http://schemas.microsoft.com/office/drawing/2017/decorative" xmlns="" val="1"/>
               </a:ext>
             </a:extLst>
           </p:cNvPr>
@@ -10154,7 +10213,7 @@
                 <a16:creationId xmlns:a16="http://schemas.microsoft.com/office/drawing/2014/main" id="{D07DD2DE-F619-49DD-B5E7-03A290FF4ED1}"/>
               </a:ext>
               <a:ext uri="{C183D7F6-B498-43B3-948B-1728B52AA6E4}">
-                <adec:decorative xmlns:adec="http://schemas.microsoft.com/office/drawing/2017/decorative" val="1"/>
+                <adec:decorative xmlns:adec="http://schemas.microsoft.com/office/drawing/2017/decorative" xmlns="" val="1"/>
               </a:ext>
             </a:extLst>
           </p:cNvPr>
@@ -10230,7 +10289,7 @@
                 <a16:creationId xmlns:a16="http://schemas.microsoft.com/office/drawing/2014/main" id="{85149191-5F60-4A28-AAFF-039F96B0F3EC}"/>
               </a:ext>
               <a:ext uri="{C183D7F6-B498-43B3-948B-1728B52AA6E4}">
-                <adec:decorative xmlns:adec="http://schemas.microsoft.com/office/drawing/2017/decorative" val="1"/>
+                <adec:decorative xmlns:adec="http://schemas.microsoft.com/office/drawing/2017/decorative" xmlns="" val="1"/>
               </a:ext>
             </a:extLst>
           </p:cNvPr>
@@ -10305,7 +10364,7 @@
                 <a16:creationId xmlns:a16="http://schemas.microsoft.com/office/drawing/2014/main" id="{F8260ED5-17F7-4158-B241-D51DD4CF1B7E}"/>
               </a:ext>
               <a:ext uri="{C183D7F6-B498-43B3-948B-1728B52AA6E4}">
-                <adec:decorative xmlns:adec="http://schemas.microsoft.com/office/drawing/2017/decorative" val="1"/>
+                <adec:decorative xmlns:adec="http://schemas.microsoft.com/office/drawing/2017/decorative" xmlns="" val="1"/>
               </a:ext>
             </a:extLst>
           </p:cNvPr>
@@ -10653,7 +10712,7 @@
                 <a16:creationId xmlns:a16="http://schemas.microsoft.com/office/drawing/2014/main" id="{A8384FB5-9ADC-4DDC-881B-597D56F5B15D}"/>
               </a:ext>
               <a:ext uri="{C183D7F6-B498-43B3-948B-1728B52AA6E4}">
-                <adec:decorative xmlns:adec="http://schemas.microsoft.com/office/drawing/2017/decorative" val="1"/>
+                <adec:decorative xmlns:adec="http://schemas.microsoft.com/office/drawing/2017/decorative" xmlns="" val="1"/>
               </a:ext>
             </a:extLst>
           </p:cNvPr>
@@ -10729,7 +10788,7 @@
                 <a16:creationId xmlns:a16="http://schemas.microsoft.com/office/drawing/2014/main" id="{91E5A9A7-95C6-4F4F-B00E-C82E07FE62EF}"/>
               </a:ext>
               <a:ext uri="{C183D7F6-B498-43B3-948B-1728B52AA6E4}">
-                <adec:decorative xmlns:adec="http://schemas.microsoft.com/office/drawing/2017/decorative" val="1"/>
+                <adec:decorative xmlns:adec="http://schemas.microsoft.com/office/drawing/2017/decorative" xmlns="" val="1"/>
               </a:ext>
             </a:extLst>
           </p:cNvPr>
@@ -10802,7 +10861,7 @@
                 <a16:creationId xmlns:a16="http://schemas.microsoft.com/office/drawing/2014/main" id="{D07DD2DE-F619-49DD-B5E7-03A290FF4ED1}"/>
               </a:ext>
               <a:ext uri="{C183D7F6-B498-43B3-948B-1728B52AA6E4}">
-                <adec:decorative xmlns:adec="http://schemas.microsoft.com/office/drawing/2017/decorative" val="1"/>
+                <adec:decorative xmlns:adec="http://schemas.microsoft.com/office/drawing/2017/decorative" xmlns="" val="1"/>
               </a:ext>
             </a:extLst>
           </p:cNvPr>
@@ -10878,7 +10937,7 @@
                 <a16:creationId xmlns:a16="http://schemas.microsoft.com/office/drawing/2014/main" id="{85149191-5F60-4A28-AAFF-039F96B0F3EC}"/>
               </a:ext>
               <a:ext uri="{C183D7F6-B498-43B3-948B-1728B52AA6E4}">
-                <adec:decorative xmlns:adec="http://schemas.microsoft.com/office/drawing/2017/decorative" val="1"/>
+                <adec:decorative xmlns:adec="http://schemas.microsoft.com/office/drawing/2017/decorative" xmlns="" val="1"/>
               </a:ext>
             </a:extLst>
           </p:cNvPr>
@@ -10953,7 +11012,7 @@
                 <a16:creationId xmlns:a16="http://schemas.microsoft.com/office/drawing/2014/main" id="{F8260ED5-17F7-4158-B241-D51DD4CF1B7E}"/>
               </a:ext>
               <a:ext uri="{C183D7F6-B498-43B3-948B-1728B52AA6E4}">
-                <adec:decorative xmlns:adec="http://schemas.microsoft.com/office/drawing/2017/decorative" val="1"/>
+                <adec:decorative xmlns:adec="http://schemas.microsoft.com/office/drawing/2017/decorative" xmlns="" val="1"/>
               </a:ext>
             </a:extLst>
           </p:cNvPr>
@@ -11320,7 +11379,7 @@
                 <a16:creationId xmlns:a16="http://schemas.microsoft.com/office/drawing/2014/main" id="{A8384FB5-9ADC-4DDC-881B-597D56F5B15D}"/>
               </a:ext>
               <a:ext uri="{C183D7F6-B498-43B3-948B-1728B52AA6E4}">
-                <adec:decorative xmlns:adec="http://schemas.microsoft.com/office/drawing/2017/decorative" val="1"/>
+                <adec:decorative xmlns:adec="http://schemas.microsoft.com/office/drawing/2017/decorative" xmlns="" val="1"/>
               </a:ext>
             </a:extLst>
           </p:cNvPr>
@@ -11396,7 +11455,7 @@
                 <a16:creationId xmlns:a16="http://schemas.microsoft.com/office/drawing/2014/main" id="{91E5A9A7-95C6-4F4F-B00E-C82E07FE62EF}"/>
               </a:ext>
               <a:ext uri="{C183D7F6-B498-43B3-948B-1728B52AA6E4}">
-                <adec:decorative xmlns:adec="http://schemas.microsoft.com/office/drawing/2017/decorative" val="1"/>
+                <adec:decorative xmlns:adec="http://schemas.microsoft.com/office/drawing/2017/decorative" xmlns="" val="1"/>
               </a:ext>
             </a:extLst>
           </p:cNvPr>
@@ -11469,7 +11528,7 @@
                 <a16:creationId xmlns:a16="http://schemas.microsoft.com/office/drawing/2014/main" id="{D07DD2DE-F619-49DD-B5E7-03A290FF4ED1}"/>
               </a:ext>
               <a:ext uri="{C183D7F6-B498-43B3-948B-1728B52AA6E4}">
-                <adec:decorative xmlns:adec="http://schemas.microsoft.com/office/drawing/2017/decorative" val="1"/>
+                <adec:decorative xmlns:adec="http://schemas.microsoft.com/office/drawing/2017/decorative" xmlns="" val="1"/>
               </a:ext>
             </a:extLst>
           </p:cNvPr>
@@ -11545,7 +11604,7 @@
                 <a16:creationId xmlns:a16="http://schemas.microsoft.com/office/drawing/2014/main" id="{85149191-5F60-4A28-AAFF-039F96B0F3EC}"/>
               </a:ext>
               <a:ext uri="{C183D7F6-B498-43B3-948B-1728B52AA6E4}">
-                <adec:decorative xmlns:adec="http://schemas.microsoft.com/office/drawing/2017/decorative" val="1"/>
+                <adec:decorative xmlns:adec="http://schemas.microsoft.com/office/drawing/2017/decorative" xmlns="" val="1"/>
               </a:ext>
             </a:extLst>
           </p:cNvPr>
@@ -11620,7 +11679,7 @@
                 <a16:creationId xmlns:a16="http://schemas.microsoft.com/office/drawing/2014/main" id="{F8260ED5-17F7-4158-B241-D51DD4CF1B7E}"/>
               </a:ext>
               <a:ext uri="{C183D7F6-B498-43B3-948B-1728B52AA6E4}">
-                <adec:decorative xmlns:adec="http://schemas.microsoft.com/office/drawing/2017/decorative" val="1"/>
+                <adec:decorative xmlns:adec="http://schemas.microsoft.com/office/drawing/2017/decorative" xmlns="" val="1"/>
               </a:ext>
             </a:extLst>
           </p:cNvPr>
@@ -11991,8 +12050,47 @@
           <a:lstStyle/>
           <a:p>
             <a:r>
-              <a:rPr lang="pt-BR" dirty="0"/>
-              <a:t>https://github.com/simoneCanto/LOO_1_Anhanguera</a:t>
+              <a:rPr lang="pt-BR" dirty="0">
+                <a:hlinkClick r:id="rId2"/>
+              </a:rPr>
+              <a:t>https://</a:t>
+            </a:r>
+            <a:r>
+              <a:rPr lang="pt-BR" dirty="0" smtClean="0">
+                <a:hlinkClick r:id="rId2"/>
+              </a:rPr>
+              <a:t>github.com/simoneCanto/LOO_1_Anhanguera</a:t>
+            </a:r>
+            <a:endParaRPr lang="pt-BR" dirty="0" smtClean="0"/>
+          </a:p>
+          <a:p>
+            <a:endParaRPr lang="pt-BR" dirty="0"/>
+          </a:p>
+          <a:p>
+            <a:r>
+              <a:rPr lang="pt-BR" dirty="0" smtClean="0"/>
+              <a:t>Todos deverão enviar o link de seus </a:t>
+            </a:r>
+            <a:r>
+              <a:rPr lang="pt-BR" dirty="0" err="1" smtClean="0"/>
+              <a:t>gits</a:t>
+            </a:r>
+            <a:r>
+              <a:rPr lang="pt-BR" dirty="0" smtClean="0"/>
+              <a:t> para meu e-mail, com seu nome completo, não abrevie seu nome, para eu comparar com a lista de chamada.</a:t>
+            </a:r>
+          </a:p>
+          <a:p>
+            <a:endParaRPr lang="pt-BR" dirty="0"/>
+          </a:p>
+          <a:p>
+            <a:r>
+              <a:rPr lang="pt-BR" sz="5400" dirty="0"/>
+              <a:t>s</a:t>
+            </a:r>
+            <a:r>
+              <a:rPr lang="pt-BR" sz="5400" dirty="0" smtClean="0"/>
+              <a:t>imone.canto@cogna.com.br</a:t>
             </a:r>
           </a:p>
         </p:txBody>
@@ -12011,6 +12109,156 @@
 </file>
 
 <file path=ppt/slides/slide17.xml><?xml version="1.0" encoding="utf-8"?>
+<p:sld xmlns:a="http://schemas.openxmlformats.org/drawingml/2006/main" xmlns:r="http://schemas.openxmlformats.org/officeDocument/2006/relationships" xmlns:p="http://schemas.openxmlformats.org/presentationml/2006/main">
+  <p:cSld>
+    <p:spTree>
+      <p:nvGrpSpPr>
+        <p:cNvPr id="1" name=""/>
+        <p:cNvGrpSpPr/>
+        <p:nvPr/>
+      </p:nvGrpSpPr>
+      <p:grpSpPr>
+        <a:xfrm>
+          <a:off x="0" y="0"/>
+          <a:ext cx="0" cy="0"/>
+          <a:chOff x="0" y="0"/>
+          <a:chExt cx="0" cy="0"/>
+        </a:xfrm>
+      </p:grpSpPr>
+      <p:sp>
+        <p:nvSpPr>
+          <p:cNvPr id="2" name="Título 1"/>
+          <p:cNvSpPr>
+            <a:spLocks noGrp="1"/>
+          </p:cNvSpPr>
+          <p:nvPr>
+            <p:ph type="title"/>
+          </p:nvPr>
+        </p:nvSpPr>
+        <p:spPr/>
+        <p:txBody>
+          <a:bodyPr/>
+          <a:lstStyle/>
+          <a:p>
+            <a:r>
+              <a:rPr lang="pt-BR" dirty="0" smtClean="0"/>
+              <a:t>Qual sua expectativa em relação ao curso de LOO?</a:t>
+            </a:r>
+            <a:endParaRPr lang="pt-BR" dirty="0"/>
+          </a:p>
+        </p:txBody>
+      </p:sp>
+      <p:sp>
+        <p:nvSpPr>
+          <p:cNvPr id="3" name="Espaço Reservado para Conteúdo 2"/>
+          <p:cNvSpPr>
+            <a:spLocks noGrp="1"/>
+          </p:cNvSpPr>
+          <p:nvPr>
+            <p:ph idx="1"/>
+          </p:nvPr>
+        </p:nvSpPr>
+        <p:spPr/>
+        <p:txBody>
+          <a:bodyPr/>
+          <a:lstStyle/>
+          <a:p>
+            <a:r>
+              <a:rPr lang="pt-BR" dirty="0" smtClean="0"/>
+              <a:t>Escreva um READMI em seu primeiro repositório, que será comparado com o ultimo READMI do curso.</a:t>
+            </a:r>
+          </a:p>
+          <a:p>
+            <a:r>
+              <a:rPr lang="pt-BR" dirty="0" smtClean="0"/>
+              <a:t>Esta atividade será corrigida.</a:t>
+            </a:r>
+            <a:endParaRPr lang="pt-BR" dirty="0"/>
+          </a:p>
+        </p:txBody>
+      </p:sp>
+    </p:spTree>
+    <p:extLst>
+      <p:ext uri="{BB962C8B-B14F-4D97-AF65-F5344CB8AC3E}">
+        <p14:creationId xmlns:p14="http://schemas.microsoft.com/office/powerpoint/2010/main" val="338105654"/>
+      </p:ext>
+    </p:extLst>
+  </p:cSld>
+  <p:clrMapOvr>
+    <a:masterClrMapping/>
+  </p:clrMapOvr>
+</p:sld>
+</file>
+
+<file path=ppt/slides/slide18.xml><?xml version="1.0" encoding="utf-8"?>
+<p:sld xmlns:a="http://schemas.openxmlformats.org/drawingml/2006/main" xmlns:r="http://schemas.openxmlformats.org/officeDocument/2006/relationships" xmlns:p="http://schemas.openxmlformats.org/presentationml/2006/main">
+  <p:cSld>
+    <p:spTree>
+      <p:nvGrpSpPr>
+        <p:cNvPr id="1" name=""/>
+        <p:cNvGrpSpPr/>
+        <p:nvPr/>
+      </p:nvGrpSpPr>
+      <p:grpSpPr>
+        <a:xfrm>
+          <a:off x="0" y="0"/>
+          <a:ext cx="0" cy="0"/>
+          <a:chOff x="0" y="0"/>
+          <a:chExt cx="0" cy="0"/>
+        </a:xfrm>
+      </p:grpSpPr>
+      <p:sp>
+        <p:nvSpPr>
+          <p:cNvPr id="2" name="Título 1"/>
+          <p:cNvSpPr>
+            <a:spLocks noGrp="1"/>
+          </p:cNvSpPr>
+          <p:nvPr>
+            <p:ph type="title"/>
+          </p:nvPr>
+        </p:nvSpPr>
+        <p:spPr/>
+        <p:txBody>
+          <a:bodyPr/>
+          <a:lstStyle/>
+          <a:p>
+            <a:endParaRPr lang="pt-BR"/>
+          </a:p>
+        </p:txBody>
+      </p:sp>
+      <p:sp>
+        <p:nvSpPr>
+          <p:cNvPr id="3" name="Espaço Reservado para Conteúdo 2"/>
+          <p:cNvSpPr>
+            <a:spLocks noGrp="1"/>
+          </p:cNvSpPr>
+          <p:nvPr>
+            <p:ph idx="1"/>
+          </p:nvPr>
+        </p:nvSpPr>
+        <p:spPr/>
+        <p:txBody>
+          <a:bodyPr/>
+          <a:lstStyle/>
+          <a:p>
+            <a:endParaRPr lang="pt-BR"/>
+          </a:p>
+        </p:txBody>
+      </p:sp>
+    </p:spTree>
+    <p:extLst>
+      <p:ext uri="{BB962C8B-B14F-4D97-AF65-F5344CB8AC3E}">
+        <p14:creationId xmlns:p14="http://schemas.microsoft.com/office/powerpoint/2010/main" val="3399726296"/>
+      </p:ext>
+    </p:extLst>
+  </p:cSld>
+  <p:clrMapOvr>
+    <a:masterClrMapping/>
+  </p:clrMapOvr>
+</p:sld>
+</file>
+
+<file path=ppt/slides/slide19.xml><?xml version="1.0" encoding="utf-8"?>
 <p:sld xmlns:a="http://schemas.openxmlformats.org/drawingml/2006/main" xmlns:r="http://schemas.openxmlformats.org/officeDocument/2006/relationships" xmlns:p="http://schemas.openxmlformats.org/presentationml/2006/main">
   <p:cSld>
     <p:spTree>
@@ -12114,7 +12362,144 @@
 </p:sld>
 </file>
 
-<file path=ppt/slides/slide18.xml><?xml version="1.0" encoding="utf-8"?>
+<file path=ppt/slides/slide2.xml><?xml version="1.0" encoding="utf-8"?>
+<p:sld xmlns:a="http://schemas.openxmlformats.org/drawingml/2006/main" xmlns:r="http://schemas.openxmlformats.org/officeDocument/2006/relationships" xmlns:p="http://schemas.openxmlformats.org/presentationml/2006/main">
+  <p:cSld>
+    <p:spTree>
+      <p:nvGrpSpPr>
+        <p:cNvPr id="1" name=""/>
+        <p:cNvGrpSpPr/>
+        <p:nvPr/>
+      </p:nvGrpSpPr>
+      <p:grpSpPr>
+        <a:xfrm>
+          <a:off x="0" y="0"/>
+          <a:ext cx="0" cy="0"/>
+          <a:chOff x="0" y="0"/>
+          <a:chExt cx="0" cy="0"/>
+        </a:xfrm>
+      </p:grpSpPr>
+      <p:sp>
+        <p:nvSpPr>
+          <p:cNvPr id="4" name="Título 3">
+            <a:extLst>
+              <a:ext uri="{FF2B5EF4-FFF2-40B4-BE49-F238E27FC236}">
+                <a16:creationId xmlns:a16="http://schemas.microsoft.com/office/drawing/2014/main" id="{BE281064-7DE4-00A8-2568-68B196A833FA}"/>
+              </a:ext>
+            </a:extLst>
+          </p:cNvPr>
+          <p:cNvSpPr>
+            <a:spLocks noGrp="1"/>
+          </p:cNvSpPr>
+          <p:nvPr>
+            <p:ph type="title"/>
+          </p:nvPr>
+        </p:nvSpPr>
+        <p:spPr/>
+        <p:txBody>
+          <a:bodyPr/>
+          <a:lstStyle/>
+          <a:p>
+            <a:r>
+              <a:rPr lang="pt-BR" dirty="0"/>
+              <a:t>Você sabia que temos um Instagram?</a:t>
+            </a:r>
+          </a:p>
+        </p:txBody>
+      </p:sp>
+      <p:pic>
+        <p:nvPicPr>
+          <p:cNvPr id="6" name="Imagem 5" descr="Interface gráfica do usuário, Aplicativo&#10;&#10;Descrição gerada automaticamente">
+            <a:extLst>
+              <a:ext uri="{FF2B5EF4-FFF2-40B4-BE49-F238E27FC236}">
+                <a16:creationId xmlns:a16="http://schemas.microsoft.com/office/drawing/2014/main" id="{2CFACC40-BE65-94F8-34A6-7227165ED3E7}"/>
+              </a:ext>
+            </a:extLst>
+          </p:cNvPr>
+          <p:cNvPicPr>
+            <a:picLocks noChangeAspect="1"/>
+          </p:cNvPicPr>
+          <p:nvPr/>
+        </p:nvPicPr>
+        <p:blipFill rotWithShape="1">
+          <a:blip r:embed="rId2">
+            <a:extLst>
+              <a:ext uri="{28A0092B-C50C-407E-A947-70E740481C1C}">
+                <a14:useLocalDpi xmlns:a14="http://schemas.microsoft.com/office/drawing/2010/main" val="0"/>
+              </a:ext>
+            </a:extLst>
+          </a:blip>
+          <a:srcRect t="10000" b="11481"/>
+          <a:stretch/>
+        </p:blipFill>
+        <p:spPr>
+          <a:xfrm>
+            <a:off x="996950" y="1231900"/>
+            <a:ext cx="3086100" cy="5384800"/>
+          </a:xfrm>
+          <a:prstGeom prst="rect">
+            <a:avLst/>
+          </a:prstGeom>
+        </p:spPr>
+      </p:pic>
+      <p:sp>
+        <p:nvSpPr>
+          <p:cNvPr id="7" name="CaixaDeTexto 6">
+            <a:extLst>
+              <a:ext uri="{FF2B5EF4-FFF2-40B4-BE49-F238E27FC236}">
+                <a16:creationId xmlns:a16="http://schemas.microsoft.com/office/drawing/2014/main" id="{24BBD791-0DDC-560F-1AC1-F6E05FE5C9A9}"/>
+              </a:ext>
+            </a:extLst>
+          </p:cNvPr>
+          <p:cNvSpPr txBox="1"/>
+          <p:nvPr/>
+        </p:nvSpPr>
+        <p:spPr>
+          <a:xfrm>
+            <a:off x="4584700" y="2603500"/>
+            <a:ext cx="7607300" cy="2308324"/>
+          </a:xfrm>
+          <a:prstGeom prst="rect">
+            <a:avLst/>
+          </a:prstGeom>
+          <a:noFill/>
+        </p:spPr>
+        <p:txBody>
+          <a:bodyPr wrap="square" rtlCol="0">
+            <a:spAutoFit/>
+          </a:bodyPr>
+          <a:lstStyle/>
+          <a:p>
+            <a:r>
+              <a:rPr lang="pt-BR" sz="3600" dirty="0"/>
+              <a:t>@fac4ouroverde</a:t>
+            </a:r>
+          </a:p>
+          <a:p>
+            <a:endParaRPr lang="pt-BR" sz="3600" dirty="0"/>
+          </a:p>
+          <a:p>
+            <a:r>
+              <a:rPr lang="pt-BR" sz="3600" dirty="0"/>
+              <a:t>Que tal nos seguir e marcar aquela aula sensacional que você teve?</a:t>
+            </a:r>
+          </a:p>
+        </p:txBody>
+      </p:sp>
+    </p:spTree>
+    <p:extLst>
+      <p:ext uri="{BB962C8B-B14F-4D97-AF65-F5344CB8AC3E}">
+        <p14:creationId xmlns:p14="http://schemas.microsoft.com/office/powerpoint/2010/main" val="1493790062"/>
+      </p:ext>
+    </p:extLst>
+  </p:cSld>
+  <p:clrMapOvr>
+    <a:masterClrMapping/>
+  </p:clrMapOvr>
+</p:sld>
+</file>
+
+<file path=ppt/slides/slide20.xml><?xml version="1.0" encoding="utf-8"?>
 <p:sld xmlns:a="http://schemas.openxmlformats.org/drawingml/2006/main" xmlns:r="http://schemas.openxmlformats.org/officeDocument/2006/relationships" xmlns:p="http://schemas.openxmlformats.org/presentationml/2006/main">
   <p:cSld>
     <p:spTree>
@@ -12254,7 +12639,7 @@
 </p:sld>
 </file>
 
-<file path=ppt/slides/slide19.xml><?xml version="1.0" encoding="utf-8"?>
+<file path=ppt/slides/slide21.xml><?xml version="1.0" encoding="utf-8"?>
 <p:sld xmlns:a="http://schemas.openxmlformats.org/drawingml/2006/main" xmlns:r="http://schemas.openxmlformats.org/officeDocument/2006/relationships" xmlns:p="http://schemas.openxmlformats.org/presentationml/2006/main">
   <p:cSld>
     <p:spTree>
@@ -12371,6 +12756,10 @@
             <a:pPr marL="0" indent="0">
               <a:buNone/>
             </a:pPr>
+            <a:r>
+              <a:rPr lang="pt-BR" dirty="0"/>
+              <a:t/>
+            </a:r>
             <a:br>
               <a:rPr lang="pt-BR" dirty="0"/>
             </a:br>
@@ -12391,144 +12780,7 @@
 </p:sld>
 </file>
 
-<file path=ppt/slides/slide2.xml><?xml version="1.0" encoding="utf-8"?>
-<p:sld xmlns:a="http://schemas.openxmlformats.org/drawingml/2006/main" xmlns:r="http://schemas.openxmlformats.org/officeDocument/2006/relationships" xmlns:p="http://schemas.openxmlformats.org/presentationml/2006/main">
-  <p:cSld>
-    <p:spTree>
-      <p:nvGrpSpPr>
-        <p:cNvPr id="1" name=""/>
-        <p:cNvGrpSpPr/>
-        <p:nvPr/>
-      </p:nvGrpSpPr>
-      <p:grpSpPr>
-        <a:xfrm>
-          <a:off x="0" y="0"/>
-          <a:ext cx="0" cy="0"/>
-          <a:chOff x="0" y="0"/>
-          <a:chExt cx="0" cy="0"/>
-        </a:xfrm>
-      </p:grpSpPr>
-      <p:sp>
-        <p:nvSpPr>
-          <p:cNvPr id="4" name="Título 3">
-            <a:extLst>
-              <a:ext uri="{FF2B5EF4-FFF2-40B4-BE49-F238E27FC236}">
-                <a16:creationId xmlns:a16="http://schemas.microsoft.com/office/drawing/2014/main" id="{BE281064-7DE4-00A8-2568-68B196A833FA}"/>
-              </a:ext>
-            </a:extLst>
-          </p:cNvPr>
-          <p:cNvSpPr>
-            <a:spLocks noGrp="1"/>
-          </p:cNvSpPr>
-          <p:nvPr>
-            <p:ph type="title"/>
-          </p:nvPr>
-        </p:nvSpPr>
-        <p:spPr/>
-        <p:txBody>
-          <a:bodyPr/>
-          <a:lstStyle/>
-          <a:p>
-            <a:r>
-              <a:rPr lang="pt-BR" dirty="0"/>
-              <a:t>Você sabia que temos um Instagram?</a:t>
-            </a:r>
-          </a:p>
-        </p:txBody>
-      </p:sp>
-      <p:pic>
-        <p:nvPicPr>
-          <p:cNvPr id="6" name="Imagem 5" descr="Interface gráfica do usuário, Aplicativo&#10;&#10;Descrição gerada automaticamente">
-            <a:extLst>
-              <a:ext uri="{FF2B5EF4-FFF2-40B4-BE49-F238E27FC236}">
-                <a16:creationId xmlns:a16="http://schemas.microsoft.com/office/drawing/2014/main" id="{2CFACC40-BE65-94F8-34A6-7227165ED3E7}"/>
-              </a:ext>
-            </a:extLst>
-          </p:cNvPr>
-          <p:cNvPicPr>
-            <a:picLocks noChangeAspect="1"/>
-          </p:cNvPicPr>
-          <p:nvPr/>
-        </p:nvPicPr>
-        <p:blipFill rotWithShape="1">
-          <a:blip r:embed="rId2">
-            <a:extLst>
-              <a:ext uri="{28A0092B-C50C-407E-A947-70E740481C1C}">
-                <a14:useLocalDpi xmlns:a14="http://schemas.microsoft.com/office/drawing/2010/main" val="0"/>
-              </a:ext>
-            </a:extLst>
-          </a:blip>
-          <a:srcRect t="10000" b="11481"/>
-          <a:stretch/>
-        </p:blipFill>
-        <p:spPr>
-          <a:xfrm>
-            <a:off x="996950" y="1231900"/>
-            <a:ext cx="3086100" cy="5384800"/>
-          </a:xfrm>
-          <a:prstGeom prst="rect">
-            <a:avLst/>
-          </a:prstGeom>
-        </p:spPr>
-      </p:pic>
-      <p:sp>
-        <p:nvSpPr>
-          <p:cNvPr id="7" name="CaixaDeTexto 6">
-            <a:extLst>
-              <a:ext uri="{FF2B5EF4-FFF2-40B4-BE49-F238E27FC236}">
-                <a16:creationId xmlns:a16="http://schemas.microsoft.com/office/drawing/2014/main" id="{24BBD791-0DDC-560F-1AC1-F6E05FE5C9A9}"/>
-              </a:ext>
-            </a:extLst>
-          </p:cNvPr>
-          <p:cNvSpPr txBox="1"/>
-          <p:nvPr/>
-        </p:nvSpPr>
-        <p:spPr>
-          <a:xfrm>
-            <a:off x="4584700" y="2603500"/>
-            <a:ext cx="7607300" cy="2308324"/>
-          </a:xfrm>
-          <a:prstGeom prst="rect">
-            <a:avLst/>
-          </a:prstGeom>
-          <a:noFill/>
-        </p:spPr>
-        <p:txBody>
-          <a:bodyPr wrap="square" rtlCol="0">
-            <a:spAutoFit/>
-          </a:bodyPr>
-          <a:lstStyle/>
-          <a:p>
-            <a:r>
-              <a:rPr lang="pt-BR" sz="3600" dirty="0"/>
-              <a:t>@fac4ouroverde</a:t>
-            </a:r>
-          </a:p>
-          <a:p>
-            <a:endParaRPr lang="pt-BR" sz="3600" dirty="0"/>
-          </a:p>
-          <a:p>
-            <a:r>
-              <a:rPr lang="pt-BR" sz="3600" dirty="0"/>
-              <a:t>Que tal nos seguir e marcar aquela aula sensacional que você teve?</a:t>
-            </a:r>
-          </a:p>
-        </p:txBody>
-      </p:sp>
-    </p:spTree>
-    <p:extLst>
-      <p:ext uri="{BB962C8B-B14F-4D97-AF65-F5344CB8AC3E}">
-        <p14:creationId xmlns:p14="http://schemas.microsoft.com/office/powerpoint/2010/main" val="1493790062"/>
-      </p:ext>
-    </p:extLst>
-  </p:cSld>
-  <p:clrMapOvr>
-    <a:masterClrMapping/>
-  </p:clrMapOvr>
-</p:sld>
-</file>
-
-<file path=ppt/slides/slide20.xml><?xml version="1.0" encoding="utf-8"?>
+<file path=ppt/slides/slide22.xml><?xml version="1.0" encoding="utf-8"?>
 <p:sld xmlns:a="http://schemas.openxmlformats.org/drawingml/2006/main" xmlns:r="http://schemas.openxmlformats.org/officeDocument/2006/relationships" xmlns:p="http://schemas.openxmlformats.org/presentationml/2006/main">
   <p:cSld>
     <p:spTree>
@@ -12588,7 +12840,7 @@
 </p:sld>
 </file>
 
-<file path=ppt/slides/slide21.xml><?xml version="1.0" encoding="utf-8"?>
+<file path=ppt/slides/slide23.xml><?xml version="1.0" encoding="utf-8"?>
 <p:sld xmlns:a="http://schemas.openxmlformats.org/drawingml/2006/main" xmlns:r="http://schemas.openxmlformats.org/officeDocument/2006/relationships" xmlns:p="http://schemas.openxmlformats.org/presentationml/2006/main">
   <p:cSld>
     <p:spTree>
@@ -12648,7 +12900,7 @@
 </p:sld>
 </file>
 
-<file path=ppt/slides/slide22.xml><?xml version="1.0" encoding="utf-8"?>
+<file path=ppt/slides/slide24.xml><?xml version="1.0" encoding="utf-8"?>
 <p:sld xmlns:a="http://schemas.openxmlformats.org/drawingml/2006/main" xmlns:r="http://schemas.openxmlformats.org/officeDocument/2006/relationships" xmlns:p="http://schemas.openxmlformats.org/presentationml/2006/main">
   <p:cSld>
     <p:spTree>
@@ -12709,7 +12961,7 @@
 </p:sld>
 </file>
 
-<file path=ppt/slides/slide23.xml><?xml version="1.0" encoding="utf-8"?>
+<file path=ppt/slides/slide25.xml><?xml version="1.0" encoding="utf-8"?>
 <p:sld xmlns:a="http://schemas.openxmlformats.org/drawingml/2006/main" xmlns:r="http://schemas.openxmlformats.org/officeDocument/2006/relationships" xmlns:p="http://schemas.openxmlformats.org/presentationml/2006/main">
   <p:cSld>
     <p:spTree>
@@ -13279,7 +13531,7 @@
 </p:sld>
 </file>
 
-<file path=ppt/slides/slide24.xml><?xml version="1.0" encoding="utf-8"?>
+<file path=ppt/slides/slide26.xml><?xml version="1.0" encoding="utf-8"?>
 <p:sld xmlns:a="http://schemas.openxmlformats.org/drawingml/2006/main" xmlns:r="http://schemas.openxmlformats.org/officeDocument/2006/relationships" xmlns:p="http://schemas.openxmlformats.org/presentationml/2006/main">
   <p:cSld>
     <p:spTree>
@@ -13621,7 +13873,7 @@
 </p:sld>
 </file>
 
-<file path=ppt/slides/slide25.xml><?xml version="1.0" encoding="utf-8"?>
+<file path=ppt/slides/slide27.xml><?xml version="1.0" encoding="utf-8"?>
 <p:sld xmlns:a="http://schemas.openxmlformats.org/drawingml/2006/main" xmlns:r="http://schemas.openxmlformats.org/officeDocument/2006/relationships" xmlns:p="http://schemas.openxmlformats.org/presentationml/2006/main">
   <p:cSld>
     <p:spTree>
@@ -13768,7 +14020,7 @@
 </p:sld>
 </file>
 
-<file path=ppt/slides/slide26.xml><?xml version="1.0" encoding="utf-8"?>
+<file path=ppt/slides/slide28.xml><?xml version="1.0" encoding="utf-8"?>
 <p:sld xmlns:a="http://schemas.openxmlformats.org/drawingml/2006/main" xmlns:r="http://schemas.openxmlformats.org/officeDocument/2006/relationships" xmlns:p="http://schemas.openxmlformats.org/presentationml/2006/main">
   <p:cSld>
     <p:spTree>
@@ -13864,7 +14116,7 @@
 </p:sld>
 </file>
 
-<file path=ppt/slides/slide27.xml><?xml version="1.0" encoding="utf-8"?>
+<file path=ppt/slides/slide29.xml><?xml version="1.0" encoding="utf-8"?>
 <p:sld xmlns:a="http://schemas.openxmlformats.org/drawingml/2006/main" xmlns:r="http://schemas.openxmlformats.org/officeDocument/2006/relationships" xmlns:p="http://schemas.openxmlformats.org/presentationml/2006/main">
   <p:cSld>
     <p:spTree>
@@ -13915,126 +14167,6 @@
     <p:extLst>
       <p:ext uri="{BB962C8B-B14F-4D97-AF65-F5344CB8AC3E}">
         <p14:creationId xmlns:p14="http://schemas.microsoft.com/office/powerpoint/2010/main" val="3214954732"/>
-      </p:ext>
-    </p:extLst>
-  </p:cSld>
-  <p:clrMapOvr>
-    <a:masterClrMapping/>
-  </p:clrMapOvr>
-</p:sld>
-</file>
-
-<file path=ppt/slides/slide28.xml><?xml version="1.0" encoding="utf-8"?>
-<p:sld xmlns:a="http://schemas.openxmlformats.org/drawingml/2006/main" xmlns:r="http://schemas.openxmlformats.org/officeDocument/2006/relationships" xmlns:p="http://schemas.openxmlformats.org/presentationml/2006/main">
-  <p:cSld>
-    <p:spTree>
-      <p:nvGrpSpPr>
-        <p:cNvPr id="1" name=""/>
-        <p:cNvGrpSpPr/>
-        <p:nvPr/>
-      </p:nvGrpSpPr>
-      <p:grpSpPr>
-        <a:xfrm>
-          <a:off x="0" y="0"/>
-          <a:ext cx="0" cy="0"/>
-          <a:chOff x="0" y="0"/>
-          <a:chExt cx="0" cy="0"/>
-        </a:xfrm>
-      </p:grpSpPr>
-      <p:pic>
-        <p:nvPicPr>
-          <p:cNvPr id="5" name="Imagem 4">
-            <a:extLst>
-              <a:ext uri="{FF2B5EF4-FFF2-40B4-BE49-F238E27FC236}">
-                <a16:creationId xmlns:a16="http://schemas.microsoft.com/office/drawing/2014/main" id="{CEBB9C4C-20F3-D4B5-C38E-CF9D21D8664D}"/>
-              </a:ext>
-            </a:extLst>
-          </p:cNvPr>
-          <p:cNvPicPr>
-            <a:picLocks noChangeAspect="1"/>
-          </p:cNvPicPr>
-          <p:nvPr/>
-        </p:nvPicPr>
-        <p:blipFill>
-          <a:blip r:embed="rId2"/>
-          <a:stretch>
-            <a:fillRect/>
-          </a:stretch>
-        </p:blipFill>
-        <p:spPr>
-          <a:xfrm>
-            <a:off x="2351314" y="320828"/>
-            <a:ext cx="7311957" cy="6069086"/>
-          </a:xfrm>
-          <a:prstGeom prst="rect">
-            <a:avLst/>
-          </a:prstGeom>
-        </p:spPr>
-      </p:pic>
-    </p:spTree>
-    <p:extLst>
-      <p:ext uri="{BB962C8B-B14F-4D97-AF65-F5344CB8AC3E}">
-        <p14:creationId xmlns:p14="http://schemas.microsoft.com/office/powerpoint/2010/main" val="702990669"/>
-      </p:ext>
-    </p:extLst>
-  </p:cSld>
-  <p:clrMapOvr>
-    <a:masterClrMapping/>
-  </p:clrMapOvr>
-</p:sld>
-</file>
-
-<file path=ppt/slides/slide29.xml><?xml version="1.0" encoding="utf-8"?>
-<p:sld xmlns:a="http://schemas.openxmlformats.org/drawingml/2006/main" xmlns:r="http://schemas.openxmlformats.org/officeDocument/2006/relationships" xmlns:p="http://schemas.openxmlformats.org/presentationml/2006/main">
-  <p:cSld>
-    <p:spTree>
-      <p:nvGrpSpPr>
-        <p:cNvPr id="1" name=""/>
-        <p:cNvGrpSpPr/>
-        <p:nvPr/>
-      </p:nvGrpSpPr>
-      <p:grpSpPr>
-        <a:xfrm>
-          <a:off x="0" y="0"/>
-          <a:ext cx="0" cy="0"/>
-          <a:chOff x="0" y="0"/>
-          <a:chExt cx="0" cy="0"/>
-        </a:xfrm>
-      </p:grpSpPr>
-      <p:pic>
-        <p:nvPicPr>
-          <p:cNvPr id="5" name="Imagem 4">
-            <a:extLst>
-              <a:ext uri="{FF2B5EF4-FFF2-40B4-BE49-F238E27FC236}">
-                <a16:creationId xmlns:a16="http://schemas.microsoft.com/office/drawing/2014/main" id="{6D31AABB-FB8F-2DA8-2118-392134002BE9}"/>
-              </a:ext>
-            </a:extLst>
-          </p:cNvPr>
-          <p:cNvPicPr>
-            <a:picLocks noChangeAspect="1"/>
-          </p:cNvPicPr>
-          <p:nvPr/>
-        </p:nvPicPr>
-        <p:blipFill>
-          <a:blip r:embed="rId2"/>
-          <a:stretch>
-            <a:fillRect/>
-          </a:stretch>
-        </p:blipFill>
-        <p:spPr>
-          <a:xfrm>
-            <a:off x="1948543" y="368927"/>
-            <a:ext cx="7983474" cy="5890359"/>
-          </a:xfrm>
-          <a:prstGeom prst="rect">
-            <a:avLst/>
-          </a:prstGeom>
-        </p:spPr>
-      </p:pic>
-    </p:spTree>
-    <p:extLst>
-      <p:ext uri="{BB962C8B-B14F-4D97-AF65-F5344CB8AC3E}">
-        <p14:creationId xmlns:p14="http://schemas.microsoft.com/office/powerpoint/2010/main" val="756079942"/>
       </p:ext>
     </p:extLst>
   </p:cSld>
@@ -14174,6 +14306,126 @@
           <p:cNvPr id="5" name="Imagem 4">
             <a:extLst>
               <a:ext uri="{FF2B5EF4-FFF2-40B4-BE49-F238E27FC236}">
+                <a16:creationId xmlns:a16="http://schemas.microsoft.com/office/drawing/2014/main" id="{CEBB9C4C-20F3-D4B5-C38E-CF9D21D8664D}"/>
+              </a:ext>
+            </a:extLst>
+          </p:cNvPr>
+          <p:cNvPicPr>
+            <a:picLocks noChangeAspect="1"/>
+          </p:cNvPicPr>
+          <p:nvPr/>
+        </p:nvPicPr>
+        <p:blipFill>
+          <a:blip r:embed="rId2"/>
+          <a:stretch>
+            <a:fillRect/>
+          </a:stretch>
+        </p:blipFill>
+        <p:spPr>
+          <a:xfrm>
+            <a:off x="2351314" y="320828"/>
+            <a:ext cx="7311957" cy="6069086"/>
+          </a:xfrm>
+          <a:prstGeom prst="rect">
+            <a:avLst/>
+          </a:prstGeom>
+        </p:spPr>
+      </p:pic>
+    </p:spTree>
+    <p:extLst>
+      <p:ext uri="{BB962C8B-B14F-4D97-AF65-F5344CB8AC3E}">
+        <p14:creationId xmlns:p14="http://schemas.microsoft.com/office/powerpoint/2010/main" val="702990669"/>
+      </p:ext>
+    </p:extLst>
+  </p:cSld>
+  <p:clrMapOvr>
+    <a:masterClrMapping/>
+  </p:clrMapOvr>
+</p:sld>
+</file>
+
+<file path=ppt/slides/slide31.xml><?xml version="1.0" encoding="utf-8"?>
+<p:sld xmlns:a="http://schemas.openxmlformats.org/drawingml/2006/main" xmlns:r="http://schemas.openxmlformats.org/officeDocument/2006/relationships" xmlns:p="http://schemas.openxmlformats.org/presentationml/2006/main">
+  <p:cSld>
+    <p:spTree>
+      <p:nvGrpSpPr>
+        <p:cNvPr id="1" name=""/>
+        <p:cNvGrpSpPr/>
+        <p:nvPr/>
+      </p:nvGrpSpPr>
+      <p:grpSpPr>
+        <a:xfrm>
+          <a:off x="0" y="0"/>
+          <a:ext cx="0" cy="0"/>
+          <a:chOff x="0" y="0"/>
+          <a:chExt cx="0" cy="0"/>
+        </a:xfrm>
+      </p:grpSpPr>
+      <p:pic>
+        <p:nvPicPr>
+          <p:cNvPr id="5" name="Imagem 4">
+            <a:extLst>
+              <a:ext uri="{FF2B5EF4-FFF2-40B4-BE49-F238E27FC236}">
+                <a16:creationId xmlns:a16="http://schemas.microsoft.com/office/drawing/2014/main" id="{6D31AABB-FB8F-2DA8-2118-392134002BE9}"/>
+              </a:ext>
+            </a:extLst>
+          </p:cNvPr>
+          <p:cNvPicPr>
+            <a:picLocks noChangeAspect="1"/>
+          </p:cNvPicPr>
+          <p:nvPr/>
+        </p:nvPicPr>
+        <p:blipFill>
+          <a:blip r:embed="rId2"/>
+          <a:stretch>
+            <a:fillRect/>
+          </a:stretch>
+        </p:blipFill>
+        <p:spPr>
+          <a:xfrm>
+            <a:off x="1948543" y="368927"/>
+            <a:ext cx="7983474" cy="5890359"/>
+          </a:xfrm>
+          <a:prstGeom prst="rect">
+            <a:avLst/>
+          </a:prstGeom>
+        </p:spPr>
+      </p:pic>
+    </p:spTree>
+    <p:extLst>
+      <p:ext uri="{BB962C8B-B14F-4D97-AF65-F5344CB8AC3E}">
+        <p14:creationId xmlns:p14="http://schemas.microsoft.com/office/powerpoint/2010/main" val="756079942"/>
+      </p:ext>
+    </p:extLst>
+  </p:cSld>
+  <p:clrMapOvr>
+    <a:masterClrMapping/>
+  </p:clrMapOvr>
+</p:sld>
+</file>
+
+<file path=ppt/slides/slide32.xml><?xml version="1.0" encoding="utf-8"?>
+<p:sld xmlns:a="http://schemas.openxmlformats.org/drawingml/2006/main" xmlns:r="http://schemas.openxmlformats.org/officeDocument/2006/relationships" xmlns:p="http://schemas.openxmlformats.org/presentationml/2006/main">
+  <p:cSld>
+    <p:spTree>
+      <p:nvGrpSpPr>
+        <p:cNvPr id="1" name=""/>
+        <p:cNvGrpSpPr/>
+        <p:nvPr/>
+      </p:nvGrpSpPr>
+      <p:grpSpPr>
+        <a:xfrm>
+          <a:off x="0" y="0"/>
+          <a:ext cx="0" cy="0"/>
+          <a:chOff x="0" y="0"/>
+          <a:chExt cx="0" cy="0"/>
+        </a:xfrm>
+      </p:grpSpPr>
+      <p:pic>
+        <p:nvPicPr>
+          <p:cNvPr id="5" name="Imagem 4">
+            <a:extLst>
+              <a:ext uri="{FF2B5EF4-FFF2-40B4-BE49-F238E27FC236}">
                 <a16:creationId xmlns:a16="http://schemas.microsoft.com/office/drawing/2014/main" id="{77F48A6C-0B48-4A78-8CE6-065FA675132B}"/>
               </a:ext>
             </a:extLst>
@@ -14212,7 +14464,7 @@
 </p:sld>
 </file>
 
-<file path=ppt/slides/slide31.xml><?xml version="1.0" encoding="utf-8"?>
+<file path=ppt/slides/slide33.xml><?xml version="1.0" encoding="utf-8"?>
 <p:sld xmlns:a="http://schemas.openxmlformats.org/drawingml/2006/main" xmlns:r="http://schemas.openxmlformats.org/officeDocument/2006/relationships" xmlns:p="http://schemas.openxmlformats.org/presentationml/2006/main">
   <p:cSld>
     <p:spTree>
@@ -14426,7 +14678,7 @@
 </p:sld>
 </file>
 
-<file path=ppt/slides/slide32.xml><?xml version="1.0" encoding="utf-8"?>
+<file path=ppt/slides/slide34.xml><?xml version="1.0" encoding="utf-8"?>
 <p:sld xmlns:a="http://schemas.openxmlformats.org/drawingml/2006/main" xmlns:r="http://schemas.openxmlformats.org/officeDocument/2006/relationships" xmlns:p="http://schemas.openxmlformats.org/presentationml/2006/main">
   <p:cSld>
     <p:spTree>
@@ -14512,7 +14764,7 @@
 </p:sld>
 </file>
 
-<file path=ppt/slides/slide33.xml><?xml version="1.0" encoding="utf-8"?>
+<file path=ppt/slides/slide35.xml><?xml version="1.0" encoding="utf-8"?>
 <p:sld xmlns:a="http://schemas.openxmlformats.org/drawingml/2006/main" xmlns:r="http://schemas.openxmlformats.org/officeDocument/2006/relationships" xmlns:p="http://schemas.openxmlformats.org/presentationml/2006/main">
   <p:cSld>
     <p:spTree>
@@ -14573,7 +14825,7 @@
 </p:sld>
 </file>
 
-<file path=ppt/slides/slide34.xml><?xml version="1.0" encoding="utf-8"?>
+<file path=ppt/slides/slide36.xml><?xml version="1.0" encoding="utf-8"?>
 <p:sld xmlns:a="http://schemas.openxmlformats.org/drawingml/2006/main" xmlns:r="http://schemas.openxmlformats.org/officeDocument/2006/relationships" xmlns:p="http://schemas.openxmlformats.org/presentationml/2006/main">
   <p:cSld>
     <p:spTree>
@@ -15096,7 +15348,7 @@
 </p:sld>
 </file>
 
-<file path=ppt/slides/slide35.xml><?xml version="1.0" encoding="utf-8"?>
+<file path=ppt/slides/slide37.xml><?xml version="1.0" encoding="utf-8"?>
 <p:sld xmlns:a="http://schemas.openxmlformats.org/drawingml/2006/main" xmlns:r="http://schemas.openxmlformats.org/officeDocument/2006/relationships" xmlns:p="http://schemas.openxmlformats.org/presentationml/2006/main">
   <p:cSld>
     <p:spTree>
@@ -15194,7 +15446,7 @@
 </p:sld>
 </file>
 
-<file path=ppt/slides/slide36.xml><?xml version="1.0" encoding="utf-8"?>
+<file path=ppt/slides/slide38.xml><?xml version="1.0" encoding="utf-8"?>
 <p:sld xmlns:a="http://schemas.openxmlformats.org/drawingml/2006/main" xmlns:r="http://schemas.openxmlformats.org/officeDocument/2006/relationships" xmlns:p="http://schemas.openxmlformats.org/presentationml/2006/main">
   <p:cSld>
     <p:spTree>

--- a/aula_1.pptx
+++ b/aula_1.pptx
@@ -7751,7 +7751,7 @@
           <a:p>
             <a:fld id="{45B54C55-F32B-4432-9C16-2395E37A544A}" type="datetimeFigureOut">
               <a:rPr lang="pt-BR" smtClean="0"/>
-              <a:t>09/02/2026</a:t>
+              <a:t>02/03/2026</a:t>
             </a:fld>
             <a:endParaRPr lang="pt-BR"/>
           </a:p>
@@ -9214,6 +9214,13 @@
   <p:clrMapOvr>
     <a:masterClrMapping/>
   </p:clrMapOvr>
+  <p:timing>
+    <p:tnLst>
+      <p:par>
+        <p:cTn id="1" dur="indefinite" restart="never" nodeType="tmRoot"/>
+      </p:par>
+    </p:tnLst>
+  </p:timing>
 </p:sld>
 </file>
 
@@ -9299,6 +9306,13 @@
   <p:clrMapOvr>
     <a:masterClrMapping/>
   </p:clrMapOvr>
+  <p:timing>
+    <p:tnLst>
+      <p:par>
+        <p:cTn id="1" dur="indefinite" restart="never" nodeType="tmRoot"/>
+      </p:par>
+    </p:tnLst>
+  </p:timing>
 </p:sld>
 </file>
 
@@ -9335,7 +9349,7 @@
                 <a16:creationId xmlns:a16="http://schemas.microsoft.com/office/drawing/2014/main" id="{A8384FB5-9ADC-4DDC-881B-597D56F5B15D}"/>
               </a:ext>
               <a:ext uri="{C183D7F6-B498-43B3-948B-1728B52AA6E4}">
-                <adec:decorative xmlns:adec="http://schemas.microsoft.com/office/drawing/2017/decorative" xmlns="" val="1"/>
+                <adec:decorative xmlns="" xmlns:adec="http://schemas.microsoft.com/office/drawing/2017/decorative" val="1"/>
               </a:ext>
             </a:extLst>
           </p:cNvPr>
@@ -9411,7 +9425,7 @@
                 <a16:creationId xmlns:a16="http://schemas.microsoft.com/office/drawing/2014/main" id="{91E5A9A7-95C6-4F4F-B00E-C82E07FE62EF}"/>
               </a:ext>
               <a:ext uri="{C183D7F6-B498-43B3-948B-1728B52AA6E4}">
-                <adec:decorative xmlns:adec="http://schemas.microsoft.com/office/drawing/2017/decorative" xmlns="" val="1"/>
+                <adec:decorative xmlns="" xmlns:adec="http://schemas.microsoft.com/office/drawing/2017/decorative" val="1"/>
               </a:ext>
             </a:extLst>
           </p:cNvPr>
@@ -9484,7 +9498,7 @@
                 <a16:creationId xmlns:a16="http://schemas.microsoft.com/office/drawing/2014/main" id="{D07DD2DE-F619-49DD-B5E7-03A290FF4ED1}"/>
               </a:ext>
               <a:ext uri="{C183D7F6-B498-43B3-948B-1728B52AA6E4}">
-                <adec:decorative xmlns:adec="http://schemas.microsoft.com/office/drawing/2017/decorative" xmlns="" val="1"/>
+                <adec:decorative xmlns="" xmlns:adec="http://schemas.microsoft.com/office/drawing/2017/decorative" val="1"/>
               </a:ext>
             </a:extLst>
           </p:cNvPr>
@@ -9560,7 +9574,7 @@
                 <a16:creationId xmlns:a16="http://schemas.microsoft.com/office/drawing/2014/main" id="{85149191-5F60-4A28-AAFF-039F96B0F3EC}"/>
               </a:ext>
               <a:ext uri="{C183D7F6-B498-43B3-948B-1728B52AA6E4}">
-                <adec:decorative xmlns:adec="http://schemas.microsoft.com/office/drawing/2017/decorative" xmlns="" val="1"/>
+                <adec:decorative xmlns="" xmlns:adec="http://schemas.microsoft.com/office/drawing/2017/decorative" val="1"/>
               </a:ext>
             </a:extLst>
           </p:cNvPr>
@@ -9635,7 +9649,7 @@
                 <a16:creationId xmlns:a16="http://schemas.microsoft.com/office/drawing/2014/main" id="{F8260ED5-17F7-4158-B241-D51DD4CF1B7E}"/>
               </a:ext>
               <a:ext uri="{C183D7F6-B498-43B3-948B-1728B52AA6E4}">
-                <adec:decorative xmlns:adec="http://schemas.microsoft.com/office/drawing/2017/decorative" xmlns="" val="1"/>
+                <adec:decorative xmlns="" xmlns:adec="http://schemas.microsoft.com/office/drawing/2017/decorative" val="1"/>
               </a:ext>
             </a:extLst>
           </p:cNvPr>
@@ -10064,7 +10078,7 @@
                 <a16:creationId xmlns:a16="http://schemas.microsoft.com/office/drawing/2014/main" id="{A8384FB5-9ADC-4DDC-881B-597D56F5B15D}"/>
               </a:ext>
               <a:ext uri="{C183D7F6-B498-43B3-948B-1728B52AA6E4}">
-                <adec:decorative xmlns:adec="http://schemas.microsoft.com/office/drawing/2017/decorative" xmlns="" val="1"/>
+                <adec:decorative xmlns="" xmlns:adec="http://schemas.microsoft.com/office/drawing/2017/decorative" val="1"/>
               </a:ext>
             </a:extLst>
           </p:cNvPr>
@@ -10140,7 +10154,7 @@
                 <a16:creationId xmlns:a16="http://schemas.microsoft.com/office/drawing/2014/main" id="{91E5A9A7-95C6-4F4F-B00E-C82E07FE62EF}"/>
               </a:ext>
               <a:ext uri="{C183D7F6-B498-43B3-948B-1728B52AA6E4}">
-                <adec:decorative xmlns:adec="http://schemas.microsoft.com/office/drawing/2017/decorative" xmlns="" val="1"/>
+                <adec:decorative xmlns="" xmlns:adec="http://schemas.microsoft.com/office/drawing/2017/decorative" val="1"/>
               </a:ext>
             </a:extLst>
           </p:cNvPr>
@@ -10213,7 +10227,7 @@
                 <a16:creationId xmlns:a16="http://schemas.microsoft.com/office/drawing/2014/main" id="{D07DD2DE-F619-49DD-B5E7-03A290FF4ED1}"/>
               </a:ext>
               <a:ext uri="{C183D7F6-B498-43B3-948B-1728B52AA6E4}">
-                <adec:decorative xmlns:adec="http://schemas.microsoft.com/office/drawing/2017/decorative" xmlns="" val="1"/>
+                <adec:decorative xmlns="" xmlns:adec="http://schemas.microsoft.com/office/drawing/2017/decorative" val="1"/>
               </a:ext>
             </a:extLst>
           </p:cNvPr>
@@ -10289,7 +10303,7 @@
                 <a16:creationId xmlns:a16="http://schemas.microsoft.com/office/drawing/2014/main" id="{85149191-5F60-4A28-AAFF-039F96B0F3EC}"/>
               </a:ext>
               <a:ext uri="{C183D7F6-B498-43B3-948B-1728B52AA6E4}">
-                <adec:decorative xmlns:adec="http://schemas.microsoft.com/office/drawing/2017/decorative" xmlns="" val="1"/>
+                <adec:decorative xmlns="" xmlns:adec="http://schemas.microsoft.com/office/drawing/2017/decorative" val="1"/>
               </a:ext>
             </a:extLst>
           </p:cNvPr>
@@ -10364,7 +10378,7 @@
                 <a16:creationId xmlns:a16="http://schemas.microsoft.com/office/drawing/2014/main" id="{F8260ED5-17F7-4158-B241-D51DD4CF1B7E}"/>
               </a:ext>
               <a:ext uri="{C183D7F6-B498-43B3-948B-1728B52AA6E4}">
-                <adec:decorative xmlns:adec="http://schemas.microsoft.com/office/drawing/2017/decorative" xmlns="" val="1"/>
+                <adec:decorative xmlns="" xmlns:adec="http://schemas.microsoft.com/office/drawing/2017/decorative" val="1"/>
               </a:ext>
             </a:extLst>
           </p:cNvPr>
@@ -10676,6 +10690,13 @@
   <p:clrMapOvr>
     <a:masterClrMapping/>
   </p:clrMapOvr>
+  <p:timing>
+    <p:tnLst>
+      <p:par>
+        <p:cTn id="1" dur="indefinite" restart="never" nodeType="tmRoot"/>
+      </p:par>
+    </p:tnLst>
+  </p:timing>
 </p:sld>
 </file>
 
@@ -10712,7 +10733,7 @@
                 <a16:creationId xmlns:a16="http://schemas.microsoft.com/office/drawing/2014/main" id="{A8384FB5-9ADC-4DDC-881B-597D56F5B15D}"/>
               </a:ext>
               <a:ext uri="{C183D7F6-B498-43B3-948B-1728B52AA6E4}">
-                <adec:decorative xmlns:adec="http://schemas.microsoft.com/office/drawing/2017/decorative" xmlns="" val="1"/>
+                <adec:decorative xmlns="" xmlns:adec="http://schemas.microsoft.com/office/drawing/2017/decorative" val="1"/>
               </a:ext>
             </a:extLst>
           </p:cNvPr>
@@ -10788,7 +10809,7 @@
                 <a16:creationId xmlns:a16="http://schemas.microsoft.com/office/drawing/2014/main" id="{91E5A9A7-95C6-4F4F-B00E-C82E07FE62EF}"/>
               </a:ext>
               <a:ext uri="{C183D7F6-B498-43B3-948B-1728B52AA6E4}">
-                <adec:decorative xmlns:adec="http://schemas.microsoft.com/office/drawing/2017/decorative" xmlns="" val="1"/>
+                <adec:decorative xmlns="" xmlns:adec="http://schemas.microsoft.com/office/drawing/2017/decorative" val="1"/>
               </a:ext>
             </a:extLst>
           </p:cNvPr>
@@ -10861,7 +10882,7 @@
                 <a16:creationId xmlns:a16="http://schemas.microsoft.com/office/drawing/2014/main" id="{D07DD2DE-F619-49DD-B5E7-03A290FF4ED1}"/>
               </a:ext>
               <a:ext uri="{C183D7F6-B498-43B3-948B-1728B52AA6E4}">
-                <adec:decorative xmlns:adec="http://schemas.microsoft.com/office/drawing/2017/decorative" xmlns="" val="1"/>
+                <adec:decorative xmlns="" xmlns:adec="http://schemas.microsoft.com/office/drawing/2017/decorative" val="1"/>
               </a:ext>
             </a:extLst>
           </p:cNvPr>
@@ -10937,7 +10958,7 @@
                 <a16:creationId xmlns:a16="http://schemas.microsoft.com/office/drawing/2014/main" id="{85149191-5F60-4A28-AAFF-039F96B0F3EC}"/>
               </a:ext>
               <a:ext uri="{C183D7F6-B498-43B3-948B-1728B52AA6E4}">
-                <adec:decorative xmlns:adec="http://schemas.microsoft.com/office/drawing/2017/decorative" xmlns="" val="1"/>
+                <adec:decorative xmlns="" xmlns:adec="http://schemas.microsoft.com/office/drawing/2017/decorative" val="1"/>
               </a:ext>
             </a:extLst>
           </p:cNvPr>
@@ -11012,7 +11033,7 @@
                 <a16:creationId xmlns:a16="http://schemas.microsoft.com/office/drawing/2014/main" id="{F8260ED5-17F7-4158-B241-D51DD4CF1B7E}"/>
               </a:ext>
               <a:ext uri="{C183D7F6-B498-43B3-948B-1728B52AA6E4}">
-                <adec:decorative xmlns:adec="http://schemas.microsoft.com/office/drawing/2017/decorative" xmlns="" val="1"/>
+                <adec:decorative xmlns="" xmlns:adec="http://schemas.microsoft.com/office/drawing/2017/decorative" val="1"/>
               </a:ext>
             </a:extLst>
           </p:cNvPr>
@@ -11343,6 +11364,13 @@
   <p:clrMapOvr>
     <a:masterClrMapping/>
   </p:clrMapOvr>
+  <p:timing>
+    <p:tnLst>
+      <p:par>
+        <p:cTn id="1" dur="indefinite" restart="never" nodeType="tmRoot"/>
+      </p:par>
+    </p:tnLst>
+  </p:timing>
 </p:sld>
 </file>
 
@@ -11379,7 +11407,7 @@
                 <a16:creationId xmlns:a16="http://schemas.microsoft.com/office/drawing/2014/main" id="{A8384FB5-9ADC-4DDC-881B-597D56F5B15D}"/>
               </a:ext>
               <a:ext uri="{C183D7F6-B498-43B3-948B-1728B52AA6E4}">
-                <adec:decorative xmlns:adec="http://schemas.microsoft.com/office/drawing/2017/decorative" xmlns="" val="1"/>
+                <adec:decorative xmlns="" xmlns:adec="http://schemas.microsoft.com/office/drawing/2017/decorative" val="1"/>
               </a:ext>
             </a:extLst>
           </p:cNvPr>
@@ -11455,7 +11483,7 @@
                 <a16:creationId xmlns:a16="http://schemas.microsoft.com/office/drawing/2014/main" id="{91E5A9A7-95C6-4F4F-B00E-C82E07FE62EF}"/>
               </a:ext>
               <a:ext uri="{C183D7F6-B498-43B3-948B-1728B52AA6E4}">
-                <adec:decorative xmlns:adec="http://schemas.microsoft.com/office/drawing/2017/decorative" xmlns="" val="1"/>
+                <adec:decorative xmlns="" xmlns:adec="http://schemas.microsoft.com/office/drawing/2017/decorative" val="1"/>
               </a:ext>
             </a:extLst>
           </p:cNvPr>
@@ -11528,7 +11556,7 @@
                 <a16:creationId xmlns:a16="http://schemas.microsoft.com/office/drawing/2014/main" id="{D07DD2DE-F619-49DD-B5E7-03A290FF4ED1}"/>
               </a:ext>
               <a:ext uri="{C183D7F6-B498-43B3-948B-1728B52AA6E4}">
-                <adec:decorative xmlns:adec="http://schemas.microsoft.com/office/drawing/2017/decorative" xmlns="" val="1"/>
+                <adec:decorative xmlns="" xmlns:adec="http://schemas.microsoft.com/office/drawing/2017/decorative" val="1"/>
               </a:ext>
             </a:extLst>
           </p:cNvPr>
@@ -11604,7 +11632,7 @@
                 <a16:creationId xmlns:a16="http://schemas.microsoft.com/office/drawing/2014/main" id="{85149191-5F60-4A28-AAFF-039F96B0F3EC}"/>
               </a:ext>
               <a:ext uri="{C183D7F6-B498-43B3-948B-1728B52AA6E4}">
-                <adec:decorative xmlns:adec="http://schemas.microsoft.com/office/drawing/2017/decorative" xmlns="" val="1"/>
+                <adec:decorative xmlns="" xmlns:adec="http://schemas.microsoft.com/office/drawing/2017/decorative" val="1"/>
               </a:ext>
             </a:extLst>
           </p:cNvPr>
@@ -11679,7 +11707,7 @@
                 <a16:creationId xmlns:a16="http://schemas.microsoft.com/office/drawing/2014/main" id="{F8260ED5-17F7-4158-B241-D51DD4CF1B7E}"/>
               </a:ext>
               <a:ext uri="{C183D7F6-B498-43B3-948B-1728B52AA6E4}">
-                <adec:decorative xmlns:adec="http://schemas.microsoft.com/office/drawing/2017/decorative" xmlns="" val="1"/>
+                <adec:decorative xmlns="" xmlns:adec="http://schemas.microsoft.com/office/drawing/2017/decorative" val="1"/>
               </a:ext>
             </a:extLst>
           </p:cNvPr>
@@ -11980,6 +12008,13 @@
   <p:clrMapOvr>
     <a:masterClrMapping/>
   </p:clrMapOvr>
+  <p:timing>
+    <p:tnLst>
+      <p:par>
+        <p:cTn id="1" dur="indefinite" restart="never" nodeType="tmRoot"/>
+      </p:par>
+    </p:tnLst>
+  </p:timing>
 </p:sld>
 </file>
 
@@ -12085,13 +12120,14 @@
           </a:p>
           <a:p>
             <a:r>
-              <a:rPr lang="pt-BR" sz="5400" dirty="0"/>
-              <a:t>s</a:t>
-            </a:r>
-            <a:r>
               <a:rPr lang="pt-BR" sz="5400" dirty="0" smtClean="0"/>
-              <a:t>imone.canto@cogna.com.br</a:t>
-            </a:r>
+              <a:t>Simone</a:t>
+            </a:r>
+            <a:r>
+              <a:rPr lang="pt-BR" sz="5400" dirty="0" smtClean="0"/>
+              <a:t>.tati@gmail.com</a:t>
+            </a:r>
+            <a:endParaRPr lang="pt-BR" sz="5400" dirty="0" smtClean="0"/>
           </a:p>
         </p:txBody>
       </p:sp>
@@ -12105,6 +12141,13 @@
   <p:clrMapOvr>
     <a:masterClrMapping/>
   </p:clrMapOvr>
+  <p:timing>
+    <p:tnLst>
+      <p:par>
+        <p:cTn id="1" dur="indefinite" restart="never" nodeType="tmRoot"/>
+      </p:par>
+    </p:tnLst>
+  </p:timing>
 </p:sld>
 </file>
 
@@ -12187,6 +12230,13 @@
   <p:clrMapOvr>
     <a:masterClrMapping/>
   </p:clrMapOvr>
+  <p:timing>
+    <p:tnLst>
+      <p:par>
+        <p:cTn id="1" dur="indefinite" restart="never" nodeType="tmRoot"/>
+      </p:par>
+    </p:tnLst>
+  </p:timing>
 </p:sld>
 </file>
 
@@ -12255,6 +12305,13 @@
   <p:clrMapOvr>
     <a:masterClrMapping/>
   </p:clrMapOvr>
+  <p:timing>
+    <p:tnLst>
+      <p:par>
+        <p:cTn id="1" dur="indefinite" restart="never" nodeType="tmRoot"/>
+      </p:par>
+    </p:tnLst>
+  </p:timing>
 </p:sld>
 </file>
 
@@ -12359,6 +12416,13 @@
   <p:clrMapOvr>
     <a:masterClrMapping/>
   </p:clrMapOvr>
+  <p:timing>
+    <p:tnLst>
+      <p:par>
+        <p:cTn id="1" dur="indefinite" restart="never" nodeType="tmRoot"/>
+      </p:par>
+    </p:tnLst>
+  </p:timing>
 </p:sld>
 </file>
 
@@ -12636,6 +12700,13 @@
   <p:clrMapOvr>
     <a:masterClrMapping/>
   </p:clrMapOvr>
+  <p:timing>
+    <p:tnLst>
+      <p:par>
+        <p:cTn id="1" dur="indefinite" restart="never" nodeType="tmRoot"/>
+      </p:par>
+    </p:tnLst>
+  </p:timing>
 </p:sld>
 </file>
 
@@ -12777,6 +12848,13 @@
   <p:clrMapOvr>
     <a:masterClrMapping/>
   </p:clrMapOvr>
+  <p:timing>
+    <p:tnLst>
+      <p:par>
+        <p:cTn id="1" dur="indefinite" restart="never" nodeType="tmRoot"/>
+      </p:par>
+    </p:tnLst>
+  </p:timing>
 </p:sld>
 </file>
 
@@ -12837,6 +12915,13 @@
   <p:clrMapOvr>
     <a:masterClrMapping/>
   </p:clrMapOvr>
+  <p:timing>
+    <p:tnLst>
+      <p:par>
+        <p:cTn id="1" dur="indefinite" restart="never" nodeType="tmRoot"/>
+      </p:par>
+    </p:tnLst>
+  </p:timing>
 </p:sld>
 </file>
 
@@ -12897,6 +12982,13 @@
   <p:clrMapOvr>
     <a:masterClrMapping/>
   </p:clrMapOvr>
+  <p:timing>
+    <p:tnLst>
+      <p:par>
+        <p:cTn id="1" dur="indefinite" restart="never" nodeType="tmRoot"/>
+      </p:par>
+    </p:tnLst>
+  </p:timing>
 </p:sld>
 </file>
 
@@ -12958,6 +13050,13 @@
   <p:clrMapOvr>
     <a:masterClrMapping/>
   </p:clrMapOvr>
+  <p:timing>
+    <p:tnLst>
+      <p:par>
+        <p:cTn id="1" dur="indefinite" restart="never" nodeType="tmRoot"/>
+      </p:par>
+    </p:tnLst>
+  </p:timing>
 </p:sld>
 </file>
 
@@ -13528,6 +13627,13 @@
   <p:clrMapOvr>
     <a:masterClrMapping/>
   </p:clrMapOvr>
+  <p:timing>
+    <p:tnLst>
+      <p:par>
+        <p:cTn id="1" dur="indefinite" restart="never" nodeType="tmRoot"/>
+      </p:par>
+    </p:tnLst>
+  </p:timing>
 </p:sld>
 </file>
 
@@ -13870,6 +13976,13 @@
   <p:clrMapOvr>
     <a:masterClrMapping/>
   </p:clrMapOvr>
+  <p:timing>
+    <p:tnLst>
+      <p:par>
+        <p:cTn id="1" dur="indefinite" restart="never" nodeType="tmRoot"/>
+      </p:par>
+    </p:tnLst>
+  </p:timing>
 </p:sld>
 </file>
 
@@ -14017,6 +14130,13 @@
   <p:clrMapOvr>
     <a:masterClrMapping/>
   </p:clrMapOvr>
+  <p:timing>
+    <p:tnLst>
+      <p:par>
+        <p:cTn id="1" dur="indefinite" restart="never" nodeType="tmRoot"/>
+      </p:par>
+    </p:tnLst>
+  </p:timing>
 </p:sld>
 </file>
 
@@ -14113,6 +14233,13 @@
   <p:clrMapOvr>
     <a:masterClrMapping/>
   </p:clrMapOvr>
+  <p:timing>
+    <p:tnLst>
+      <p:par>
+        <p:cTn id="1" dur="indefinite" restart="never" nodeType="tmRoot"/>
+      </p:par>
+    </p:tnLst>
+  </p:timing>
 </p:sld>
 </file>
 
@@ -16199,9 +16326,10 @@
               <a:rPr lang="pt-BR" dirty="0"/>
             </a:br>
             <a:r>
-              <a:rPr lang="pt-BR" dirty="0"/>
-              <a:t>22/09/2025</a:t>
-            </a:r>
+              <a:rPr lang="pt-BR" dirty="0" smtClean="0"/>
+              <a:t>06/04/2026</a:t>
+            </a:r>
+            <a:endParaRPr lang="pt-BR" dirty="0"/>
           </a:p>
         </p:txBody>
       </p:sp>
@@ -16255,9 +16383,10 @@
               <a:rPr lang="pt-BR" dirty="0"/>
             </a:br>
             <a:r>
-              <a:rPr lang="pt-BR" dirty="0"/>
-              <a:t>17/11/2025</a:t>
-            </a:r>
+              <a:rPr lang="pt-BR" dirty="0" smtClean="0"/>
+              <a:t>08/06/2026</a:t>
+            </a:r>
+            <a:endParaRPr lang="pt-BR" dirty="0"/>
           </a:p>
         </p:txBody>
       </p:sp>
@@ -16311,43 +16440,52 @@
           <a:p>
             <a:pPr algn="ctr"/>
             <a:r>
+              <a:rPr lang="pt-BR" dirty="0" smtClean="0"/>
+              <a:t>09/02/2026</a:t>
+            </a:r>
+            <a:endParaRPr lang="pt-BR" dirty="0"/>
+          </a:p>
+          <a:p>
+            <a:pPr algn="ctr"/>
+            <a:r>
+              <a:rPr lang="pt-BR" dirty="0" smtClean="0"/>
+              <a:t>02/03/2026</a:t>
+            </a:r>
+            <a:endParaRPr lang="pt-BR" dirty="0"/>
+          </a:p>
+          <a:p>
+            <a:pPr algn="ctr"/>
+            <a:r>
+              <a:rPr lang="pt-BR" dirty="0" smtClean="0"/>
+              <a:t>09/03/2026</a:t>
+            </a:r>
+            <a:endParaRPr lang="pt-BR" dirty="0"/>
+          </a:p>
+          <a:p>
+            <a:pPr algn="ctr"/>
+            <a:r>
+              <a:rPr lang="pt-BR" dirty="0" smtClean="0"/>
+              <a:t>16/03/2026</a:t>
+            </a:r>
+            <a:endParaRPr lang="pt-BR" dirty="0"/>
+          </a:p>
+          <a:p>
+            <a:pPr algn="ctr"/>
+            <a:r>
+              <a:rPr lang="pt-BR" dirty="0" smtClean="0"/>
+              <a:t>23/03/2026</a:t>
+            </a:r>
+            <a:endParaRPr lang="pt-BR" dirty="0"/>
+          </a:p>
+          <a:p>
+            <a:pPr algn="ctr"/>
+            <a:r>
+              <a:rPr lang="pt-BR" dirty="0" smtClean="0"/>
+              <a:t>30/03/2026</a:t>
+            </a:r>
+            <a:r>
               <a:rPr lang="pt-BR" dirty="0"/>
-              <a:t>04/08/2025</a:t>
-            </a:r>
-          </a:p>
-          <a:p>
-            <a:pPr algn="ctr"/>
-            <a:r>
-              <a:rPr lang="pt-BR" dirty="0"/>
-              <a:t>11/08/2025</a:t>
-            </a:r>
-          </a:p>
-          <a:p>
-            <a:pPr algn="ctr"/>
-            <a:r>
-              <a:rPr lang="pt-BR" dirty="0"/>
-              <a:t>18/08/2025</a:t>
-            </a:r>
-          </a:p>
-          <a:p>
-            <a:pPr algn="ctr"/>
-            <a:r>
-              <a:rPr lang="pt-BR" dirty="0"/>
-              <a:t>25/08/2025</a:t>
-            </a:r>
-          </a:p>
-          <a:p>
-            <a:pPr algn="ctr"/>
-            <a:r>
-              <a:rPr lang="pt-BR" dirty="0"/>
-              <a:t>01/09/2025</a:t>
-            </a:r>
-          </a:p>
-          <a:p>
-            <a:pPr algn="ctr"/>
-            <a:r>
-              <a:rPr lang="pt-BR" dirty="0"/>
-              <a:t>08/09/2025</a:t>
+              <a:t/>
             </a:r>
             <a:br>
               <a:rPr lang="pt-BR" dirty="0"/>
@@ -16406,43 +16544,52 @@
           <a:p>
             <a:pPr algn="ctr"/>
             <a:r>
+              <a:rPr lang="pt-BR" dirty="0" smtClean="0"/>
+              <a:t>13/04/2026</a:t>
+            </a:r>
+            <a:endParaRPr lang="pt-BR" dirty="0"/>
+          </a:p>
+          <a:p>
+            <a:pPr algn="ctr"/>
+            <a:r>
+              <a:rPr lang="pt-BR" dirty="0" smtClean="0"/>
+              <a:t>20/04/2026</a:t>
+            </a:r>
+            <a:endParaRPr lang="pt-BR" dirty="0"/>
+          </a:p>
+          <a:p>
+            <a:pPr algn="ctr"/>
+            <a:r>
+              <a:rPr lang="pt-BR" dirty="0" smtClean="0"/>
+              <a:t>27/04/2026</a:t>
+            </a:r>
+            <a:endParaRPr lang="pt-BR" dirty="0"/>
+          </a:p>
+          <a:p>
+            <a:pPr algn="ctr"/>
+            <a:r>
+              <a:rPr lang="pt-BR" dirty="0" smtClean="0"/>
+              <a:t>04/05/2026</a:t>
+            </a:r>
+            <a:endParaRPr lang="pt-BR" dirty="0"/>
+          </a:p>
+          <a:p>
+            <a:pPr algn="ctr"/>
+            <a:r>
+              <a:rPr lang="pt-BR" dirty="0" smtClean="0"/>
+              <a:t>11/05/2026</a:t>
+            </a:r>
+            <a:endParaRPr lang="pt-BR" dirty="0"/>
+          </a:p>
+          <a:p>
+            <a:pPr algn="ctr"/>
+            <a:r>
+              <a:rPr lang="pt-BR" dirty="0" smtClean="0"/>
+              <a:t>18/05/2026</a:t>
+            </a:r>
+            <a:r>
               <a:rPr lang="pt-BR" dirty="0"/>
-              <a:t>29/09/2025</a:t>
-            </a:r>
-          </a:p>
-          <a:p>
-            <a:pPr algn="ctr"/>
-            <a:r>
-              <a:rPr lang="pt-BR" dirty="0"/>
-              <a:t>06/10/2025</a:t>
-            </a:r>
-          </a:p>
-          <a:p>
-            <a:pPr algn="ctr"/>
-            <a:r>
-              <a:rPr lang="pt-BR" dirty="0"/>
-              <a:t>13/10/2025</a:t>
-            </a:r>
-          </a:p>
-          <a:p>
-            <a:pPr algn="ctr"/>
-            <a:r>
-              <a:rPr lang="pt-BR" dirty="0"/>
-              <a:t>20/10/2025</a:t>
-            </a:r>
-          </a:p>
-          <a:p>
-            <a:pPr algn="ctr"/>
-            <a:r>
-              <a:rPr lang="pt-BR" dirty="0"/>
-              <a:t>27/10/2025</a:t>
-            </a:r>
-          </a:p>
-          <a:p>
-            <a:pPr algn="ctr"/>
-            <a:r>
-              <a:rPr lang="pt-BR" dirty="0"/>
-              <a:t>03/11/2025</a:t>
+              <a:t/>
             </a:r>
             <a:br>
               <a:rPr lang="pt-BR" dirty="0"/>
@@ -16461,6 +16608,13 @@
   <p:clrMapOvr>
     <a:masterClrMapping/>
   </p:clrMapOvr>
+  <p:timing>
+    <p:tnLst>
+      <p:par>
+        <p:cTn id="1" dur="indefinite" restart="never" nodeType="tmRoot"/>
+      </p:par>
+    </p:tnLst>
+  </p:timing>
 </p:sld>
 </file>
 
@@ -16568,6 +16722,13 @@
   <p:clrMapOvr>
     <a:masterClrMapping/>
   </p:clrMapOvr>
+  <p:timing>
+    <p:tnLst>
+      <p:par>
+        <p:cTn id="1" dur="indefinite" restart="never" nodeType="tmRoot"/>
+      </p:par>
+    </p:tnLst>
+  </p:timing>
 </p:sld>
 </file>
 
